--- a/modulo-01/01.04 - Lendo Dados do Banco de Dados (ABAP SQL)/01.04_Lendo_dados_do_banco_com_ABAP_SQL.pptx
+++ b/modulo-01/01.04 - Lendo Dados do Banco de Dados (ABAP SQL)/01.04_Lendo_dados_do_banco_com_ABAP_SQL.pptx
@@ -3275,7 +3275,7 @@
                 <a:ea typeface="Courier New" pitchFamily="34" charset="-122"/>
                 <a:cs typeface="Courier New" pitchFamily="34" charset="-120"/>
               </a:rPr>
-              <a:t>AirlineID</a:t>
+              <a:t>QtdeDisponivel</a:t>
             </a:r>
             <a:r>
               <a:rPr lang="en-US" sz="1000" dirty="0">
@@ -3322,7 +3322,7 @@
                 <a:ea typeface="Courier New" pitchFamily="34" charset="-122"/>
                 <a:cs typeface="Courier New" pitchFamily="34" charset="-120"/>
               </a:rPr>
-              <a:t>\_Airline</a:t>
+              <a:t>\_CategoriaTxt</a:t>
             </a:r>
             <a:r>
               <a:rPr lang="en-US" sz="1000" dirty="0">
@@ -3502,7 +3502,7 @@
                   <a:srgbClr val="1D2D3E"/>
                 </a:solidFill>
               </a:rPr>
-              <a:t>Uma CDS view entity sobre a tabela de conexões</a:t>
+              <a:t>Uma CDS view entity sobre a tabela de itens</a:t>
             </a:r>
             <a:endParaRPr lang="en-US" sz="2800" dirty="0"/>
           </a:p>
@@ -3566,7 +3566,7 @@
         <p:spPr>
           <a:xfrm>
             <a:off x="640080" y="1700784"/>
-            <a:ext cx="2619756" cy="292608"/>
+            <a:ext cx="2075688" cy="292608"/>
           </a:xfrm>
           <a:prstGeom prst="rect">
             <a:avLst/>
@@ -3586,7 +3586,7 @@
         <p:spPr>
           <a:xfrm>
             <a:off x="640080" y="1700784"/>
-            <a:ext cx="2619756" cy="27432"/>
+            <a:ext cx="2075688" cy="27432"/>
           </a:xfrm>
           <a:prstGeom prst="rect">
             <a:avLst/>
@@ -3606,7 +3606,7 @@
         <p:spPr>
           <a:xfrm>
             <a:off x="731520" y="1719072"/>
-            <a:ext cx="2436876" cy="274320"/>
+            <a:ext cx="1892808" cy="274320"/>
           </a:xfrm>
           <a:prstGeom prst="rect">
             <a:avLst/>
@@ -3627,7 +3627,7 @@
                   <a:srgbClr val="FFFFFF"/>
                 </a:solidFill>
               </a:rPr>
-              <a:t>/dmo/i_connection.ddls.asddls</a:t>
+              <a:t>zr_pc_item.ddls.asddls</a:t>
             </a:r>
             <a:endParaRPr lang="en-US" sz="950" dirty="0"/>
           </a:p>
@@ -3663,7 +3663,7 @@
                   <a:srgbClr val="9DA5B4"/>
                 </a:solidFill>
               </a:rPr>
-              <a:t>/DMO/FLIGHT_REUSE › /DMO/I_CONNECTION (simplificada)</a:t>
+              <a:t>ZAVBS_PC_ESTOQUE › ZR_PC_ITEM (simplificada)</a:t>
             </a:r>
             <a:endParaRPr lang="en-US" sz="850" dirty="0"/>
           </a:p>
@@ -3949,6 +3949,46 @@
             </a:r>
             <a:endParaRPr lang="en-US" sz="1050" dirty="0"/>
           </a:p>
+          <a:p>
+            <a:pPr algn="r" indent="0" marL="0">
+              <a:lnSpc>
+                <a:spcPct val="105000"/>
+              </a:lnSpc>
+              <a:buNone/>
+            </a:pPr>
+            <a:r>
+              <a:rPr lang="en-US" sz="1050" dirty="0">
+                <a:solidFill>
+                  <a:srgbClr val="6E7681"/>
+                </a:solidFill>
+                <a:latin typeface="Courier New" pitchFamily="34" charset="0"/>
+                <a:ea typeface="Courier New" pitchFamily="34" charset="-122"/>
+                <a:cs typeface="Courier New" pitchFamily="34" charset="-120"/>
+              </a:rPr>
+              <a:t>14</a:t>
+            </a:r>
+            <a:endParaRPr lang="en-US" sz="1050" dirty="0"/>
+          </a:p>
+          <a:p>
+            <a:pPr algn="r" indent="0" marL="0">
+              <a:lnSpc>
+                <a:spcPct val="105000"/>
+              </a:lnSpc>
+              <a:buNone/>
+            </a:pPr>
+            <a:r>
+              <a:rPr lang="en-US" sz="1050" dirty="0">
+                <a:solidFill>
+                  <a:srgbClr val="6E7681"/>
+                </a:solidFill>
+                <a:latin typeface="Courier New" pitchFamily="34" charset="0"/>
+                <a:ea typeface="Courier New" pitchFamily="34" charset="-122"/>
+                <a:cs typeface="Courier New" pitchFamily="34" charset="-120"/>
+              </a:rPr>
+              <a:t>15</a:t>
+            </a:r>
+            <a:endParaRPr lang="en-US" sz="1050" dirty="0"/>
+          </a:p>
         </p:txBody>
       </p:sp>
       <p:sp>
@@ -4073,7 +4113,7 @@
                 <a:ea typeface="Courier New" pitchFamily="34" charset="-122"/>
                 <a:cs typeface="Courier New" pitchFamily="34" charset="-120"/>
               </a:rPr>
-              <a:t>'Flight Connection'</a:t>
+              <a:t>'CDS View Root - Item de estoque'</a:t>
             </a:r>
             <a:endParaRPr lang="en-US" sz="1050" dirty="0"/>
           </a:p>
@@ -4115,6 +4155,28 @@
                 <a:ea typeface="Courier New" pitchFamily="34" charset="-122"/>
                 <a:cs typeface="Courier New" pitchFamily="34" charset="-120"/>
               </a:rPr>
+              <a:t>root</a:t>
+            </a:r>
+            <a:r>
+              <a:rPr lang="en-US" sz="1050" dirty="0">
+                <a:solidFill>
+                  <a:srgbClr val="CCCCCC"/>
+                </a:solidFill>
+                <a:latin typeface="Courier New" pitchFamily="34" charset="0"/>
+                <a:ea typeface="Courier New" pitchFamily="34" charset="-122"/>
+                <a:cs typeface="Courier New" pitchFamily="34" charset="-120"/>
+              </a:rPr>
+              <a:t> </a:t>
+            </a:r>
+            <a:r>
+              <a:rPr lang="en-US" sz="1050" dirty="0">
+                <a:solidFill>
+                  <a:srgbClr val="569CD6"/>
+                </a:solidFill>
+                <a:latin typeface="Courier New" pitchFamily="34" charset="0"/>
+                <a:ea typeface="Courier New" pitchFamily="34" charset="-122"/>
+                <a:cs typeface="Courier New" pitchFamily="34" charset="-120"/>
+              </a:rPr>
               <a:t>view</a:t>
             </a:r>
             <a:r>
@@ -4159,7 +4221,7 @@
                 <a:ea typeface="Courier New" pitchFamily="34" charset="-122"/>
                 <a:cs typeface="Courier New" pitchFamily="34" charset="-120"/>
               </a:rPr>
-              <a:t>/DMO/I_Connection</a:t>
+              <a:t>ZR_PC_ITEM</a:t>
             </a:r>
             <a:endParaRPr lang="en-US" sz="1050" dirty="0"/>
           </a:p>
@@ -4256,51 +4318,7 @@
                 <a:ea typeface="Courier New" pitchFamily="34" charset="-122"/>
                 <a:cs typeface="Courier New" pitchFamily="34" charset="-120"/>
               </a:rPr>
-              <a:t>/dmo/connection</a:t>
-            </a:r>
-            <a:r>
-              <a:rPr lang="en-US" sz="1050" dirty="0">
-                <a:solidFill>
-                  <a:srgbClr val="CCCCCC"/>
-                </a:solidFill>
-                <a:latin typeface="Courier New" pitchFamily="34" charset="0"/>
-                <a:ea typeface="Courier New" pitchFamily="34" charset="-122"/>
-                <a:cs typeface="Courier New" pitchFamily="34" charset="-120"/>
-              </a:rPr>
-              <a:t> </a:t>
-            </a:r>
-            <a:r>
-              <a:rPr lang="en-US" sz="1050" dirty="0">
-                <a:solidFill>
-                  <a:srgbClr val="569CD6"/>
-                </a:solidFill>
-                <a:latin typeface="Courier New" pitchFamily="34" charset="0"/>
-                <a:ea typeface="Courier New" pitchFamily="34" charset="-122"/>
-                <a:cs typeface="Courier New" pitchFamily="34" charset="-120"/>
-              </a:rPr>
-              <a:t>as</a:t>
-            </a:r>
-            <a:r>
-              <a:rPr lang="en-US" sz="1050" dirty="0">
-                <a:solidFill>
-                  <a:srgbClr val="CCCCCC"/>
-                </a:solidFill>
-                <a:latin typeface="Courier New" pitchFamily="34" charset="0"/>
-                <a:ea typeface="Courier New" pitchFamily="34" charset="-122"/>
-                <a:cs typeface="Courier New" pitchFamily="34" charset="-120"/>
-              </a:rPr>
-              <a:t> </a:t>
-            </a:r>
-            <a:r>
-              <a:rPr lang="en-US" sz="1050" dirty="0">
-                <a:solidFill>
-                  <a:srgbClr val="CCCCCC"/>
-                </a:solidFill>
-                <a:latin typeface="Courier New" pitchFamily="34" charset="0"/>
-                <a:ea typeface="Courier New" pitchFamily="34" charset="-122"/>
-                <a:cs typeface="Courier New" pitchFamily="34" charset="-120"/>
-              </a:rPr>
-              <a:t>Connection</a:t>
+              <a:t>zta_pc_item</a:t>
             </a:r>
             <a:endParaRPr lang="en-US" sz="1050" dirty="0"/>
           </a:p>
@@ -4364,6 +4382,39 @@
                 <a:ea typeface="Courier New" pitchFamily="34" charset="-122"/>
                 <a:cs typeface="Courier New" pitchFamily="34" charset="-120"/>
               </a:rPr>
+              <a:t>0</a:t>
+            </a:r>
+            <a:r>
+              <a:rPr lang="en-US" sz="1050" dirty="0">
+                <a:solidFill>
+                  <a:srgbClr val="CCCCCC"/>
+                </a:solidFill>
+                <a:latin typeface="Courier New" pitchFamily="34" charset="0"/>
+                <a:ea typeface="Courier New" pitchFamily="34" charset="-122"/>
+                <a:cs typeface="Courier New" pitchFamily="34" charset="-120"/>
+              </a:rPr>
+              <a:t>.</a:t>
+            </a:r>
+            <a:r>
+              <a:rPr lang="en-US" sz="1050" dirty="0">
+                <a:solidFill>
+                  <a:srgbClr val="CCCCCC"/>
+                </a:solidFill>
+                <a:latin typeface="Courier New" pitchFamily="34" charset="0"/>
+                <a:ea typeface="Courier New" pitchFamily="34" charset="-122"/>
+                <a:cs typeface="Courier New" pitchFamily="34" charset="-120"/>
+              </a:rPr>
+              <a:t>.</a:t>
+            </a:r>
+            <a:r>
+              <a:rPr lang="en-US" sz="1050" dirty="0">
+                <a:solidFill>
+                  <a:srgbClr val="B5CEA8"/>
+                </a:solidFill>
+                <a:latin typeface="Courier New" pitchFamily="34" charset="0"/>
+                <a:ea typeface="Courier New" pitchFamily="34" charset="-122"/>
+                <a:cs typeface="Courier New" pitchFamily="34" charset="-120"/>
+              </a:rPr>
               <a:t>1</a:t>
             </a:r>
             <a:r>
@@ -4375,39 +4426,6 @@
                 <a:ea typeface="Courier New" pitchFamily="34" charset="-122"/>
                 <a:cs typeface="Courier New" pitchFamily="34" charset="-120"/>
               </a:rPr>
-              <a:t>.</a:t>
-            </a:r>
-            <a:r>
-              <a:rPr lang="en-US" sz="1050" dirty="0">
-                <a:solidFill>
-                  <a:srgbClr val="CCCCCC"/>
-                </a:solidFill>
-                <a:latin typeface="Courier New" pitchFamily="34" charset="0"/>
-                <a:ea typeface="Courier New" pitchFamily="34" charset="-122"/>
-                <a:cs typeface="Courier New" pitchFamily="34" charset="-120"/>
-              </a:rPr>
-              <a:t>.</a:t>
-            </a:r>
-            <a:r>
-              <a:rPr lang="en-US" sz="1050" dirty="0">
-                <a:solidFill>
-                  <a:srgbClr val="B5CEA8"/>
-                </a:solidFill>
-                <a:latin typeface="Courier New" pitchFamily="34" charset="0"/>
-                <a:ea typeface="Courier New" pitchFamily="34" charset="-122"/>
-                <a:cs typeface="Courier New" pitchFamily="34" charset="-120"/>
-              </a:rPr>
-              <a:t>1</a:t>
-            </a:r>
-            <a:r>
-              <a:rPr lang="en-US" sz="1050" dirty="0">
-                <a:solidFill>
-                  <a:srgbClr val="CCCCCC"/>
-                </a:solidFill>
-                <a:latin typeface="Courier New" pitchFamily="34" charset="0"/>
-                <a:ea typeface="Courier New" pitchFamily="34" charset="-122"/>
-                <a:cs typeface="Courier New" pitchFamily="34" charset="-120"/>
-              </a:rPr>
               <a:t>]</a:t>
             </a:r>
             <a:r>
@@ -4452,7 +4470,7 @@
                 <a:ea typeface="Courier New" pitchFamily="34" charset="-122"/>
                 <a:cs typeface="Courier New" pitchFamily="34" charset="-120"/>
               </a:rPr>
-              <a:t>/DMO/I_Carrier</a:t>
+              <a:t>ZR_PC_CODELIST</a:t>
             </a:r>
             <a:r>
               <a:rPr lang="en-US" sz="1050" dirty="0">
@@ -4496,7 +4514,7 @@
                 <a:ea typeface="Courier New" pitchFamily="34" charset="-122"/>
                 <a:cs typeface="Courier New" pitchFamily="34" charset="-120"/>
               </a:rPr>
-              <a:t>_Airline</a:t>
+              <a:t>_CategoriaTxt</a:t>
             </a:r>
             <a:endParaRPr lang="en-US" sz="1050" dirty="0"/>
           </a:p>
@@ -4538,84 +4556,84 @@
                 <a:ea typeface="Courier New" pitchFamily="34" charset="-122"/>
                 <a:cs typeface="Courier New" pitchFamily="34" charset="-120"/>
               </a:rPr>
+              <a:t>  </a:t>
+            </a:r>
+            <a:r>
+              <a:rPr lang="en-US" sz="1050" dirty="0">
+                <a:solidFill>
+                  <a:srgbClr val="CCCCCC"/>
+                </a:solidFill>
+                <a:latin typeface="Courier New" pitchFamily="34" charset="0"/>
+                <a:ea typeface="Courier New" pitchFamily="34" charset="-122"/>
+                <a:cs typeface="Courier New" pitchFamily="34" charset="-120"/>
+              </a:rPr>
+              <a:t>_CategoriaTxt</a:t>
+            </a:r>
+            <a:r>
+              <a:rPr lang="en-US" sz="1050" dirty="0">
+                <a:solidFill>
+                  <a:srgbClr val="CCCCCC"/>
+                </a:solidFill>
+                <a:latin typeface="Courier New" pitchFamily="34" charset="0"/>
+                <a:ea typeface="Courier New" pitchFamily="34" charset="-122"/>
+                <a:cs typeface="Courier New" pitchFamily="34" charset="-120"/>
+              </a:rPr>
+              <a:t>.</a:t>
+            </a:r>
+            <a:r>
+              <a:rPr lang="en-US" sz="1050" dirty="0">
+                <a:solidFill>
+                  <a:srgbClr val="CCCCCC"/>
+                </a:solidFill>
+                <a:latin typeface="Courier New" pitchFamily="34" charset="0"/>
+                <a:ea typeface="Courier New" pitchFamily="34" charset="-122"/>
+                <a:cs typeface="Courier New" pitchFamily="34" charset="-120"/>
+              </a:rPr>
+              <a:t>Lista</a:t>
+            </a:r>
+            <a:r>
+              <a:rPr lang="en-US" sz="1050" dirty="0">
+                <a:solidFill>
+                  <a:srgbClr val="CCCCCC"/>
+                </a:solidFill>
+                <a:latin typeface="Courier New" pitchFamily="34" charset="0"/>
+                <a:ea typeface="Courier New" pitchFamily="34" charset="-122"/>
+                <a:cs typeface="Courier New" pitchFamily="34" charset="-120"/>
+              </a:rPr>
+              <a:t>  </a:t>
+            </a:r>
+            <a:r>
+              <a:rPr lang="en-US" sz="1050" dirty="0">
+                <a:solidFill>
+                  <a:srgbClr val="CCCCCC"/>
+                </a:solidFill>
+                <a:latin typeface="Courier New" pitchFamily="34" charset="0"/>
+                <a:ea typeface="Courier New" pitchFamily="34" charset="-122"/>
+                <a:cs typeface="Courier New" pitchFamily="34" charset="-120"/>
+              </a:rPr>
+              <a:t>=</a:t>
+            </a:r>
+            <a:r>
+              <a:rPr lang="en-US" sz="1050" dirty="0">
+                <a:solidFill>
+                  <a:srgbClr val="CCCCCC"/>
+                </a:solidFill>
+                <a:latin typeface="Courier New" pitchFamily="34" charset="0"/>
+                <a:ea typeface="Courier New" pitchFamily="34" charset="-122"/>
+                <a:cs typeface="Courier New" pitchFamily="34" charset="-120"/>
+              </a:rPr>
               <a:t> </a:t>
             </a:r>
             <a:r>
               <a:rPr lang="en-US" sz="1050" dirty="0">
                 <a:solidFill>
-                  <a:srgbClr val="C586C0"/>
-                </a:solidFill>
-                <a:latin typeface="Courier New" pitchFamily="34" charset="0"/>
-                <a:ea typeface="Courier New" pitchFamily="34" charset="-122"/>
-                <a:cs typeface="Courier New" pitchFamily="34" charset="-120"/>
-              </a:rPr>
-              <a:t>$projection.AirlineID</a:t>
-            </a:r>
-            <a:r>
-              <a:rPr lang="en-US" sz="1050" dirty="0">
-                <a:solidFill>
-                  <a:srgbClr val="CCCCCC"/>
-                </a:solidFill>
-                <a:latin typeface="Courier New" pitchFamily="34" charset="0"/>
-                <a:ea typeface="Courier New" pitchFamily="34" charset="-122"/>
-                <a:cs typeface="Courier New" pitchFamily="34" charset="-120"/>
-              </a:rPr>
-              <a:t> </a:t>
-            </a:r>
-            <a:r>
-              <a:rPr lang="en-US" sz="1050" dirty="0">
-                <a:solidFill>
-                  <a:srgbClr val="CCCCCC"/>
-                </a:solidFill>
-                <a:latin typeface="Courier New" pitchFamily="34" charset="0"/>
-                <a:ea typeface="Courier New" pitchFamily="34" charset="-122"/>
-                <a:cs typeface="Courier New" pitchFamily="34" charset="-120"/>
-              </a:rPr>
-              <a:t>=</a:t>
-            </a:r>
-            <a:r>
-              <a:rPr lang="en-US" sz="1050" dirty="0">
-                <a:solidFill>
-                  <a:srgbClr val="CCCCCC"/>
-                </a:solidFill>
-                <a:latin typeface="Courier New" pitchFamily="34" charset="0"/>
-                <a:ea typeface="Courier New" pitchFamily="34" charset="-122"/>
-                <a:cs typeface="Courier New" pitchFamily="34" charset="-120"/>
-              </a:rPr>
-              <a:t> </a:t>
-            </a:r>
-            <a:r>
-              <a:rPr lang="en-US" sz="1050" dirty="0">
-                <a:solidFill>
-                  <a:srgbClr val="CCCCCC"/>
-                </a:solidFill>
-                <a:latin typeface="Courier New" pitchFamily="34" charset="0"/>
-                <a:ea typeface="Courier New" pitchFamily="34" charset="-122"/>
-                <a:cs typeface="Courier New" pitchFamily="34" charset="-120"/>
-              </a:rPr>
-              <a:t>_Airline</a:t>
-            </a:r>
-            <a:r>
-              <a:rPr lang="en-US" sz="1050" dirty="0">
-                <a:solidFill>
-                  <a:srgbClr val="CCCCCC"/>
-                </a:solidFill>
-                <a:latin typeface="Courier New" pitchFamily="34" charset="0"/>
-                <a:ea typeface="Courier New" pitchFamily="34" charset="-122"/>
-                <a:cs typeface="Courier New" pitchFamily="34" charset="-120"/>
-              </a:rPr>
-              <a:t>.</a:t>
-            </a:r>
-            <a:r>
-              <a:rPr lang="en-US" sz="1050" dirty="0">
-                <a:solidFill>
-                  <a:srgbClr val="CCCCCC"/>
-                </a:solidFill>
-                <a:latin typeface="Courier New" pitchFamily="34" charset="0"/>
-                <a:ea typeface="Courier New" pitchFamily="34" charset="-122"/>
-                <a:cs typeface="Courier New" pitchFamily="34" charset="-120"/>
-              </a:rPr>
-              <a:t>AirlineID</a:t>
+                  <a:srgbClr val="CE9178"/>
+                </a:solidFill>
+                <a:latin typeface="Courier New" pitchFamily="34" charset="0"/>
+                <a:ea typeface="Courier New" pitchFamily="34" charset="-122"/>
+                <a:cs typeface="Courier New" pitchFamily="34" charset="-120"/>
+              </a:rPr>
+              <a:t>'CATEGORIA'</a:t>
             </a:r>
             <a:endParaRPr lang="en-US" sz="1050" dirty="0"/>
           </a:p>
@@ -4635,7 +4653,106 @@
                 <a:ea typeface="Courier New" pitchFamily="34" charset="-122"/>
                 <a:cs typeface="Courier New" pitchFamily="34" charset="-120"/>
               </a:rPr>
-              <a:t>{</a:t>
+              <a:t>    </a:t>
+            </a:r>
+            <a:r>
+              <a:rPr lang="en-US" sz="1050" dirty="0">
+                <a:solidFill>
+                  <a:srgbClr val="569CD6"/>
+                </a:solidFill>
+                <a:latin typeface="Courier New" pitchFamily="34" charset="0"/>
+                <a:ea typeface="Courier New" pitchFamily="34" charset="-122"/>
+                <a:cs typeface="Courier New" pitchFamily="34" charset="-120"/>
+              </a:rPr>
+              <a:t>and</a:t>
+            </a:r>
+            <a:r>
+              <a:rPr lang="en-US" sz="1050" dirty="0">
+                <a:solidFill>
+                  <a:srgbClr val="CCCCCC"/>
+                </a:solidFill>
+                <a:latin typeface="Courier New" pitchFamily="34" charset="0"/>
+                <a:ea typeface="Courier New" pitchFamily="34" charset="-122"/>
+                <a:cs typeface="Courier New" pitchFamily="34" charset="-120"/>
+              </a:rPr>
+              <a:t> </a:t>
+            </a:r>
+            <a:r>
+              <a:rPr lang="en-US" sz="1050" dirty="0">
+                <a:solidFill>
+                  <a:srgbClr val="CCCCCC"/>
+                </a:solidFill>
+                <a:latin typeface="Courier New" pitchFamily="34" charset="0"/>
+                <a:ea typeface="Courier New" pitchFamily="34" charset="-122"/>
+                <a:cs typeface="Courier New" pitchFamily="34" charset="-120"/>
+              </a:rPr>
+              <a:t>_CategoriaTxt</a:t>
+            </a:r>
+            <a:r>
+              <a:rPr lang="en-US" sz="1050" dirty="0">
+                <a:solidFill>
+                  <a:srgbClr val="CCCCCC"/>
+                </a:solidFill>
+                <a:latin typeface="Courier New" pitchFamily="34" charset="0"/>
+                <a:ea typeface="Courier New" pitchFamily="34" charset="-122"/>
+                <a:cs typeface="Courier New" pitchFamily="34" charset="-120"/>
+              </a:rPr>
+              <a:t>.</a:t>
+            </a:r>
+            <a:r>
+              <a:rPr lang="en-US" sz="1050" dirty="0">
+                <a:solidFill>
+                  <a:srgbClr val="CCCCCC"/>
+                </a:solidFill>
+                <a:latin typeface="Courier New" pitchFamily="34" charset="0"/>
+                <a:ea typeface="Courier New" pitchFamily="34" charset="-122"/>
+                <a:cs typeface="Courier New" pitchFamily="34" charset="-120"/>
+              </a:rPr>
+              <a:t>Codigo</a:t>
+            </a:r>
+            <a:r>
+              <a:rPr lang="en-US" sz="1050" dirty="0">
+                <a:solidFill>
+                  <a:srgbClr val="CCCCCC"/>
+                </a:solidFill>
+                <a:latin typeface="Courier New" pitchFamily="34" charset="0"/>
+                <a:ea typeface="Courier New" pitchFamily="34" charset="-122"/>
+                <a:cs typeface="Courier New" pitchFamily="34" charset="-120"/>
+              </a:rPr>
+              <a:t> </a:t>
+            </a:r>
+            <a:r>
+              <a:rPr lang="en-US" sz="1050" dirty="0">
+                <a:solidFill>
+                  <a:srgbClr val="CCCCCC"/>
+                </a:solidFill>
+                <a:latin typeface="Courier New" pitchFamily="34" charset="0"/>
+                <a:ea typeface="Courier New" pitchFamily="34" charset="-122"/>
+                <a:cs typeface="Courier New" pitchFamily="34" charset="-120"/>
+              </a:rPr>
+              <a:t>=</a:t>
+            </a:r>
+            <a:r>
+              <a:rPr lang="en-US" sz="1050" dirty="0">
+                <a:solidFill>
+                  <a:srgbClr val="CCCCCC"/>
+                </a:solidFill>
+                <a:latin typeface="Courier New" pitchFamily="34" charset="0"/>
+                <a:ea typeface="Courier New" pitchFamily="34" charset="-122"/>
+                <a:cs typeface="Courier New" pitchFamily="34" charset="-120"/>
+              </a:rPr>
+              <a:t> </a:t>
+            </a:r>
+            <a:r>
+              <a:rPr lang="en-US" sz="1050" dirty="0">
+                <a:solidFill>
+                  <a:srgbClr val="C586C0"/>
+                </a:solidFill>
+                <a:latin typeface="Courier New" pitchFamily="34" charset="0"/>
+                <a:ea typeface="Courier New" pitchFamily="34" charset="-122"/>
+                <a:cs typeface="Courier New" pitchFamily="34" charset="-120"/>
+              </a:rPr>
+              <a:t>$projection.Categoria</a:t>
             </a:r>
             <a:endParaRPr lang="en-US" sz="1050" dirty="0"/>
           </a:p>
@@ -4655,117 +4772,7 @@
                 <a:ea typeface="Courier New" pitchFamily="34" charset="-122"/>
                 <a:cs typeface="Courier New" pitchFamily="34" charset="-120"/>
               </a:rPr>
-              <a:t>  </a:t>
-            </a:r>
-            <a:r>
-              <a:rPr lang="en-US" sz="1050" dirty="0">
-                <a:solidFill>
-                  <a:srgbClr val="569CD6"/>
-                </a:solidFill>
-                <a:latin typeface="Courier New" pitchFamily="34" charset="0"/>
-                <a:ea typeface="Courier New" pitchFamily="34" charset="-122"/>
-                <a:cs typeface="Courier New" pitchFamily="34" charset="-120"/>
-              </a:rPr>
-              <a:t>key</a:t>
-            </a:r>
-            <a:r>
-              <a:rPr lang="en-US" sz="1050" dirty="0">
-                <a:solidFill>
-                  <a:srgbClr val="CCCCCC"/>
-                </a:solidFill>
-                <a:latin typeface="Courier New" pitchFamily="34" charset="0"/>
-                <a:ea typeface="Courier New" pitchFamily="34" charset="-122"/>
-                <a:cs typeface="Courier New" pitchFamily="34" charset="-120"/>
-              </a:rPr>
-              <a:t> </a:t>
-            </a:r>
-            <a:r>
-              <a:rPr lang="en-US" sz="1050" dirty="0">
-                <a:solidFill>
-                  <a:srgbClr val="CCCCCC"/>
-                </a:solidFill>
-                <a:latin typeface="Courier New" pitchFamily="34" charset="0"/>
-                <a:ea typeface="Courier New" pitchFamily="34" charset="-122"/>
-                <a:cs typeface="Courier New" pitchFamily="34" charset="-120"/>
-              </a:rPr>
-              <a:t>Connection</a:t>
-            </a:r>
-            <a:r>
-              <a:rPr lang="en-US" sz="1050" dirty="0">
-                <a:solidFill>
-                  <a:srgbClr val="CCCCCC"/>
-                </a:solidFill>
-                <a:latin typeface="Courier New" pitchFamily="34" charset="0"/>
-                <a:ea typeface="Courier New" pitchFamily="34" charset="-122"/>
-                <a:cs typeface="Courier New" pitchFamily="34" charset="-120"/>
-              </a:rPr>
-              <a:t>.</a:t>
-            </a:r>
-            <a:r>
-              <a:rPr lang="en-US" sz="1050" dirty="0">
-                <a:solidFill>
-                  <a:srgbClr val="CCCCCC"/>
-                </a:solidFill>
-                <a:latin typeface="Courier New" pitchFamily="34" charset="0"/>
-                <a:ea typeface="Courier New" pitchFamily="34" charset="-122"/>
-                <a:cs typeface="Courier New" pitchFamily="34" charset="-120"/>
-              </a:rPr>
-              <a:t>carrier_id</a:t>
-            </a:r>
-            <a:r>
-              <a:rPr lang="en-US" sz="1050" dirty="0">
-                <a:solidFill>
-                  <a:srgbClr val="CCCCCC"/>
-                </a:solidFill>
-                <a:latin typeface="Courier New" pitchFamily="34" charset="0"/>
-                <a:ea typeface="Courier New" pitchFamily="34" charset="-122"/>
-                <a:cs typeface="Courier New" pitchFamily="34" charset="-120"/>
-              </a:rPr>
-              <a:t>      </a:t>
-            </a:r>
-            <a:r>
-              <a:rPr lang="en-US" sz="1050" dirty="0">
-                <a:solidFill>
-                  <a:srgbClr val="569CD6"/>
-                </a:solidFill>
-                <a:latin typeface="Courier New" pitchFamily="34" charset="0"/>
-                <a:ea typeface="Courier New" pitchFamily="34" charset="-122"/>
-                <a:cs typeface="Courier New" pitchFamily="34" charset="-120"/>
-              </a:rPr>
-              <a:t>as</a:t>
-            </a:r>
-            <a:r>
-              <a:rPr lang="en-US" sz="1050" dirty="0">
-                <a:solidFill>
-                  <a:srgbClr val="CCCCCC"/>
-                </a:solidFill>
-                <a:latin typeface="Courier New" pitchFamily="34" charset="0"/>
-                <a:ea typeface="Courier New" pitchFamily="34" charset="-122"/>
-                <a:cs typeface="Courier New" pitchFamily="34" charset="-120"/>
-              </a:rPr>
-              <a:t> </a:t>
-            </a:r>
-            <a:r>
-              <a:rPr lang="en-US" sz="1050" dirty="0">
-                <a:solidFill>
-                  <a:srgbClr val="CCCCCC"/>
-                </a:solidFill>
-                <a:latin typeface="Courier New" pitchFamily="34" charset="0"/>
-                <a:ea typeface="Courier New" pitchFamily="34" charset="-122"/>
-                <a:cs typeface="Courier New" pitchFamily="34" charset="-120"/>
-              </a:rPr>
-              <a:t>AirlineID</a:t>
-            </a:r>
-            <a:r>
-              <a:rPr lang="en-US" sz="1050" dirty="0">
-                <a:solidFill>
-                  <a:srgbClr val="CCCCCC"/>
-                </a:solidFill>
-                <a:latin typeface="Courier New" pitchFamily="34" charset="0"/>
-                <a:ea typeface="Courier New" pitchFamily="34" charset="-122"/>
-                <a:cs typeface="Courier New" pitchFamily="34" charset="-120"/>
-              </a:rPr>
-              <a:t>,</a:t>
+              <a:t>{</a:t>
             </a:r>
             <a:endParaRPr lang="en-US" sz="1050" dirty="0"/>
           </a:p>
@@ -4818,40 +4825,18 @@
                 <a:ea typeface="Courier New" pitchFamily="34" charset="-122"/>
                 <a:cs typeface="Courier New" pitchFamily="34" charset="-120"/>
               </a:rPr>
-              <a:t>Connection</a:t>
-            </a:r>
-            <a:r>
-              <a:rPr lang="en-US" sz="1050" dirty="0">
-                <a:solidFill>
-                  <a:srgbClr val="CCCCCC"/>
-                </a:solidFill>
-                <a:latin typeface="Courier New" pitchFamily="34" charset="0"/>
-                <a:ea typeface="Courier New" pitchFamily="34" charset="-122"/>
-                <a:cs typeface="Courier New" pitchFamily="34" charset="-120"/>
-              </a:rPr>
-              <a:t>.</a:t>
-            </a:r>
-            <a:r>
-              <a:rPr lang="en-US" sz="1050" dirty="0">
-                <a:solidFill>
-                  <a:srgbClr val="CCCCCC"/>
-                </a:solidFill>
-                <a:latin typeface="Courier New" pitchFamily="34" charset="0"/>
-                <a:ea typeface="Courier New" pitchFamily="34" charset="-122"/>
-                <a:cs typeface="Courier New" pitchFamily="34" charset="-120"/>
-              </a:rPr>
-              <a:t>connection_id</a:t>
-            </a:r>
-            <a:r>
-              <a:rPr lang="en-US" sz="1050" dirty="0">
-                <a:solidFill>
-                  <a:srgbClr val="CCCCCC"/>
-                </a:solidFill>
-                <a:latin typeface="Courier New" pitchFamily="34" charset="0"/>
-                <a:ea typeface="Courier New" pitchFamily="34" charset="-122"/>
-                <a:cs typeface="Courier New" pitchFamily="34" charset="-120"/>
-              </a:rPr>
-              <a:t>   </a:t>
+              <a:t>item_uuid</a:t>
+            </a:r>
+            <a:r>
+              <a:rPr lang="en-US" sz="1050" dirty="0">
+                <a:solidFill>
+                  <a:srgbClr val="CCCCCC"/>
+                </a:solidFill>
+                <a:latin typeface="Courier New" pitchFamily="34" charset="0"/>
+                <a:ea typeface="Courier New" pitchFamily="34" charset="-122"/>
+                <a:cs typeface="Courier New" pitchFamily="34" charset="-120"/>
+              </a:rPr>
+              <a:t>       </a:t>
             </a:r>
             <a:r>
               <a:rPr lang="en-US" sz="1050" dirty="0">
@@ -4884,7 +4869,7 @@
                 <a:ea typeface="Courier New" pitchFamily="34" charset="-122"/>
                 <a:cs typeface="Courier New" pitchFamily="34" charset="-120"/>
               </a:rPr>
-              <a:t>ConnectionID</a:t>
+              <a:t>ItemUUID</a:t>
             </a:r>
             <a:r>
               <a:rPr lang="en-US" sz="1050" dirty="0">
@@ -4926,29 +4911,29 @@
                 <a:ea typeface="Courier New" pitchFamily="34" charset="-122"/>
                 <a:cs typeface="Courier New" pitchFamily="34" charset="-120"/>
               </a:rPr>
-              <a:t>Connection</a:t>
-            </a:r>
-            <a:r>
-              <a:rPr lang="en-US" sz="1050" dirty="0">
-                <a:solidFill>
-                  <a:srgbClr val="CCCCCC"/>
-                </a:solidFill>
-                <a:latin typeface="Courier New" pitchFamily="34" charset="0"/>
-                <a:ea typeface="Courier New" pitchFamily="34" charset="-122"/>
-                <a:cs typeface="Courier New" pitchFamily="34" charset="-120"/>
-              </a:rPr>
-              <a:t>.</a:t>
-            </a:r>
-            <a:r>
-              <a:rPr lang="en-US" sz="1050" dirty="0">
-                <a:solidFill>
-                  <a:srgbClr val="CCCCCC"/>
-                </a:solidFill>
-                <a:latin typeface="Courier New" pitchFamily="34" charset="0"/>
-                <a:ea typeface="Courier New" pitchFamily="34" charset="-122"/>
-                <a:cs typeface="Courier New" pitchFamily="34" charset="-120"/>
-              </a:rPr>
-              <a:t>airport_from_id</a:t>
+              <a:t>sku</a:t>
+            </a:r>
+            <a:r>
+              <a:rPr lang="en-US" sz="1050" dirty="0">
+                <a:solidFill>
+                  <a:srgbClr val="CCCCCC"/>
+                </a:solidFill>
+                <a:latin typeface="Courier New" pitchFamily="34" charset="0"/>
+                <a:ea typeface="Courier New" pitchFamily="34" charset="-122"/>
+                <a:cs typeface="Courier New" pitchFamily="34" charset="-120"/>
+              </a:rPr>
+              <a:t>             </a:t>
+            </a:r>
+            <a:r>
+              <a:rPr lang="en-US" sz="1050" dirty="0">
+                <a:solidFill>
+                  <a:srgbClr val="569CD6"/>
+                </a:solidFill>
+                <a:latin typeface="Courier New" pitchFamily="34" charset="0"/>
+                <a:ea typeface="Courier New" pitchFamily="34" charset="-122"/>
+                <a:cs typeface="Courier New" pitchFamily="34" charset="-120"/>
+              </a:rPr>
+              <a:t>as</a:t>
             </a:r>
             <a:r>
               <a:rPr lang="en-US" sz="1050" dirty="0">
@@ -4964,35 +4949,13 @@
             <a:r>
               <a:rPr lang="en-US" sz="1050" dirty="0">
                 <a:solidFill>
-                  <a:srgbClr val="569CD6"/>
-                </a:solidFill>
-                <a:latin typeface="Courier New" pitchFamily="34" charset="0"/>
-                <a:ea typeface="Courier New" pitchFamily="34" charset="-122"/>
-                <a:cs typeface="Courier New" pitchFamily="34" charset="-120"/>
-              </a:rPr>
-              <a:t>as</a:t>
-            </a:r>
-            <a:r>
-              <a:rPr lang="en-US" sz="1050" dirty="0">
-                <a:solidFill>
-                  <a:srgbClr val="CCCCCC"/>
-                </a:solidFill>
-                <a:latin typeface="Courier New" pitchFamily="34" charset="0"/>
-                <a:ea typeface="Courier New" pitchFamily="34" charset="-122"/>
-                <a:cs typeface="Courier New" pitchFamily="34" charset="-120"/>
-              </a:rPr>
-              <a:t> </a:t>
-            </a:r>
-            <a:r>
-              <a:rPr lang="en-US" sz="1050" dirty="0">
-                <a:solidFill>
-                  <a:srgbClr val="CCCCCC"/>
-                </a:solidFill>
-                <a:latin typeface="Courier New" pitchFamily="34" charset="0"/>
-                <a:ea typeface="Courier New" pitchFamily="34" charset="-122"/>
-                <a:cs typeface="Courier New" pitchFamily="34" charset="-120"/>
-              </a:rPr>
-              <a:t>DepartureAirport</a:t>
+                  <a:srgbClr val="CCCCCC"/>
+                </a:solidFill>
+                <a:latin typeface="Courier New" pitchFamily="34" charset="0"/>
+                <a:ea typeface="Courier New" pitchFamily="34" charset="-122"/>
+                <a:cs typeface="Courier New" pitchFamily="34" charset="-120"/>
+              </a:rPr>
+              <a:t>Sku</a:t>
             </a:r>
             <a:r>
               <a:rPr lang="en-US" sz="1050" dirty="0">
@@ -5034,40 +4997,18 @@
                 <a:ea typeface="Courier New" pitchFamily="34" charset="-122"/>
                 <a:cs typeface="Courier New" pitchFamily="34" charset="-120"/>
               </a:rPr>
-              <a:t>Connection</a:t>
-            </a:r>
-            <a:r>
-              <a:rPr lang="en-US" sz="1050" dirty="0">
-                <a:solidFill>
-                  <a:srgbClr val="CCCCCC"/>
-                </a:solidFill>
-                <a:latin typeface="Courier New" pitchFamily="34" charset="0"/>
-                <a:ea typeface="Courier New" pitchFamily="34" charset="-122"/>
-                <a:cs typeface="Courier New" pitchFamily="34" charset="-120"/>
-              </a:rPr>
-              <a:t>.</a:t>
-            </a:r>
-            <a:r>
-              <a:rPr lang="en-US" sz="1050" dirty="0">
-                <a:solidFill>
-                  <a:srgbClr val="CCCCCC"/>
-                </a:solidFill>
-                <a:latin typeface="Courier New" pitchFamily="34" charset="0"/>
-                <a:ea typeface="Courier New" pitchFamily="34" charset="-122"/>
-                <a:cs typeface="Courier New" pitchFamily="34" charset="-120"/>
-              </a:rPr>
-              <a:t>airport_to_id</a:t>
-            </a:r>
-            <a:r>
-              <a:rPr lang="en-US" sz="1050" dirty="0">
-                <a:solidFill>
-                  <a:srgbClr val="CCCCCC"/>
-                </a:solidFill>
-                <a:latin typeface="Courier New" pitchFamily="34" charset="0"/>
-                <a:ea typeface="Courier New" pitchFamily="34" charset="-122"/>
-                <a:cs typeface="Courier New" pitchFamily="34" charset="-120"/>
-              </a:rPr>
-              <a:t>   </a:t>
+              <a:t>nome</a:t>
+            </a:r>
+            <a:r>
+              <a:rPr lang="en-US" sz="1050" dirty="0">
+                <a:solidFill>
+                  <a:srgbClr val="CCCCCC"/>
+                </a:solidFill>
+                <a:latin typeface="Courier New" pitchFamily="34" charset="0"/>
+                <a:ea typeface="Courier New" pitchFamily="34" charset="-122"/>
+                <a:cs typeface="Courier New" pitchFamily="34" charset="-120"/>
+              </a:rPr>
+              <a:t>            </a:t>
             </a:r>
             <a:r>
               <a:rPr lang="en-US" sz="1050" dirty="0">
@@ -5100,7 +5041,7 @@
                 <a:ea typeface="Courier New" pitchFamily="34" charset="-122"/>
                 <a:cs typeface="Courier New" pitchFamily="34" charset="-120"/>
               </a:rPr>
-              <a:t>DestinationAirport</a:t>
+              <a:t>Nome</a:t>
             </a:r>
             <a:r>
               <a:rPr lang="en-US" sz="1050" dirty="0">
@@ -5142,7 +5083,179 @@
                 <a:ea typeface="Courier New" pitchFamily="34" charset="-122"/>
                 <a:cs typeface="Courier New" pitchFamily="34" charset="-120"/>
               </a:rPr>
-              <a:t>_Airline</a:t>
+              <a:t>categoria</a:t>
+            </a:r>
+            <a:r>
+              <a:rPr lang="en-US" sz="1050" dirty="0">
+                <a:solidFill>
+                  <a:srgbClr val="CCCCCC"/>
+                </a:solidFill>
+                <a:latin typeface="Courier New" pitchFamily="34" charset="0"/>
+                <a:ea typeface="Courier New" pitchFamily="34" charset="-122"/>
+                <a:cs typeface="Courier New" pitchFamily="34" charset="-120"/>
+              </a:rPr>
+              <a:t>       </a:t>
+            </a:r>
+            <a:r>
+              <a:rPr lang="en-US" sz="1050" dirty="0">
+                <a:solidFill>
+                  <a:srgbClr val="569CD6"/>
+                </a:solidFill>
+                <a:latin typeface="Courier New" pitchFamily="34" charset="0"/>
+                <a:ea typeface="Courier New" pitchFamily="34" charset="-122"/>
+                <a:cs typeface="Courier New" pitchFamily="34" charset="-120"/>
+              </a:rPr>
+              <a:t>as</a:t>
+            </a:r>
+            <a:r>
+              <a:rPr lang="en-US" sz="1050" dirty="0">
+                <a:solidFill>
+                  <a:srgbClr val="CCCCCC"/>
+                </a:solidFill>
+                <a:latin typeface="Courier New" pitchFamily="34" charset="0"/>
+                <a:ea typeface="Courier New" pitchFamily="34" charset="-122"/>
+                <a:cs typeface="Courier New" pitchFamily="34" charset="-120"/>
+              </a:rPr>
+              <a:t> </a:t>
+            </a:r>
+            <a:r>
+              <a:rPr lang="en-US" sz="1050" dirty="0">
+                <a:solidFill>
+                  <a:srgbClr val="CCCCCC"/>
+                </a:solidFill>
+                <a:latin typeface="Courier New" pitchFamily="34" charset="0"/>
+                <a:ea typeface="Courier New" pitchFamily="34" charset="-122"/>
+                <a:cs typeface="Courier New" pitchFamily="34" charset="-120"/>
+              </a:rPr>
+              <a:t>Categoria</a:t>
+            </a:r>
+            <a:r>
+              <a:rPr lang="en-US" sz="1050" dirty="0">
+                <a:solidFill>
+                  <a:srgbClr val="CCCCCC"/>
+                </a:solidFill>
+                <a:latin typeface="Courier New" pitchFamily="34" charset="0"/>
+                <a:ea typeface="Courier New" pitchFamily="34" charset="-122"/>
+                <a:cs typeface="Courier New" pitchFamily="34" charset="-120"/>
+              </a:rPr>
+              <a:t>,</a:t>
+            </a:r>
+            <a:endParaRPr lang="en-US" sz="1050" dirty="0"/>
+          </a:p>
+          <a:p>
+            <a:pPr indent="0" marL="0">
+              <a:lnSpc>
+                <a:spcPct val="105000"/>
+              </a:lnSpc>
+              <a:buNone/>
+            </a:pPr>
+            <a:r>
+              <a:rPr lang="en-US" sz="1050" dirty="0">
+                <a:solidFill>
+                  <a:srgbClr val="CCCCCC"/>
+                </a:solidFill>
+                <a:latin typeface="Courier New" pitchFamily="34" charset="0"/>
+                <a:ea typeface="Courier New" pitchFamily="34" charset="-122"/>
+                <a:cs typeface="Courier New" pitchFamily="34" charset="-120"/>
+              </a:rPr>
+              <a:t>      </a:t>
+            </a:r>
+            <a:r>
+              <a:rPr lang="en-US" sz="1050" dirty="0">
+                <a:solidFill>
+                  <a:srgbClr val="CCCCCC"/>
+                </a:solidFill>
+                <a:latin typeface="Courier New" pitchFamily="34" charset="0"/>
+                <a:ea typeface="Courier New" pitchFamily="34" charset="-122"/>
+                <a:cs typeface="Courier New" pitchFamily="34" charset="-120"/>
+              </a:rPr>
+              <a:t>qtde_disponivel</a:t>
+            </a:r>
+            <a:r>
+              <a:rPr lang="en-US" sz="1050" dirty="0">
+                <a:solidFill>
+                  <a:srgbClr val="CCCCCC"/>
+                </a:solidFill>
+                <a:latin typeface="Courier New" pitchFamily="34" charset="0"/>
+                <a:ea typeface="Courier New" pitchFamily="34" charset="-122"/>
+                <a:cs typeface="Courier New" pitchFamily="34" charset="-120"/>
+              </a:rPr>
+              <a:t> </a:t>
+            </a:r>
+            <a:r>
+              <a:rPr lang="en-US" sz="1050" dirty="0">
+                <a:solidFill>
+                  <a:srgbClr val="569CD6"/>
+                </a:solidFill>
+                <a:latin typeface="Courier New" pitchFamily="34" charset="0"/>
+                <a:ea typeface="Courier New" pitchFamily="34" charset="-122"/>
+                <a:cs typeface="Courier New" pitchFamily="34" charset="-120"/>
+              </a:rPr>
+              <a:t>as</a:t>
+            </a:r>
+            <a:r>
+              <a:rPr lang="en-US" sz="1050" dirty="0">
+                <a:solidFill>
+                  <a:srgbClr val="CCCCCC"/>
+                </a:solidFill>
+                <a:latin typeface="Courier New" pitchFamily="34" charset="0"/>
+                <a:ea typeface="Courier New" pitchFamily="34" charset="-122"/>
+                <a:cs typeface="Courier New" pitchFamily="34" charset="-120"/>
+              </a:rPr>
+              <a:t> </a:t>
+            </a:r>
+            <a:r>
+              <a:rPr lang="en-US" sz="1050" dirty="0">
+                <a:solidFill>
+                  <a:srgbClr val="CCCCCC"/>
+                </a:solidFill>
+                <a:latin typeface="Courier New" pitchFamily="34" charset="0"/>
+                <a:ea typeface="Courier New" pitchFamily="34" charset="-122"/>
+                <a:cs typeface="Courier New" pitchFamily="34" charset="-120"/>
+              </a:rPr>
+              <a:t>QtdeDisponivel</a:t>
+            </a:r>
+            <a:r>
+              <a:rPr lang="en-US" sz="1050" dirty="0">
+                <a:solidFill>
+                  <a:srgbClr val="CCCCCC"/>
+                </a:solidFill>
+                <a:latin typeface="Courier New" pitchFamily="34" charset="0"/>
+                <a:ea typeface="Courier New" pitchFamily="34" charset="-122"/>
+                <a:cs typeface="Courier New" pitchFamily="34" charset="-120"/>
+              </a:rPr>
+              <a:t>,</a:t>
+            </a:r>
+            <a:endParaRPr lang="en-US" sz="1050" dirty="0"/>
+          </a:p>
+          <a:p>
+            <a:pPr indent="0" marL="0">
+              <a:lnSpc>
+                <a:spcPct val="105000"/>
+              </a:lnSpc>
+              <a:buNone/>
+            </a:pPr>
+            <a:r>
+              <a:rPr lang="en-US" sz="1050" dirty="0">
+                <a:solidFill>
+                  <a:srgbClr val="CCCCCC"/>
+                </a:solidFill>
+                <a:latin typeface="Courier New" pitchFamily="34" charset="0"/>
+                <a:ea typeface="Courier New" pitchFamily="34" charset="-122"/>
+                <a:cs typeface="Courier New" pitchFamily="34" charset="-120"/>
+              </a:rPr>
+              <a:t>      </a:t>
+            </a:r>
+            <a:r>
+              <a:rPr lang="en-US" sz="1050" dirty="0">
+                <a:solidFill>
+                  <a:srgbClr val="CCCCCC"/>
+                </a:solidFill>
+                <a:latin typeface="Courier New" pitchFamily="34" charset="0"/>
+                <a:ea typeface="Courier New" pitchFamily="34" charset="-122"/>
+                <a:cs typeface="Courier New" pitchFamily="34" charset="-120"/>
+              </a:rPr>
+              <a:t>_CategoriaTxt</a:t>
             </a:r>
             <a:endParaRPr lang="en-US" sz="1050" dirty="0"/>
           </a:p>
@@ -5294,7 +5407,7 @@
                 <a:ea typeface="Courier New" pitchFamily="34" charset="-122"/>
                 <a:cs typeface="Courier New" pitchFamily="34" charset="-120"/>
               </a:rPr>
-              <a:t>define view entity</a:t>
+              <a:t>define root view entity</a:t>
             </a:r>
             <a:endParaRPr lang="en-US" sz="1400" dirty="0"/>
           </a:p>
@@ -5327,7 +5440,26 @@
                   <a:srgbClr val="556B82"/>
                 </a:solidFill>
               </a:rPr>
-              <a:t>, a fonte de dados com um alias.</a:t>
+              <a:t>, a fonte. </a:t>
+            </a:r>
+            <a:r>
+              <a:rPr lang="en-US" sz="1050" dirty="0">
+                <a:solidFill>
+                  <a:srgbClr val="0064D9"/>
+                </a:solidFill>
+                <a:latin typeface="Courier New" pitchFamily="34" charset="0"/>
+                <a:ea typeface="Courier New" pitchFamily="34" charset="-122"/>
+                <a:cs typeface="Courier New" pitchFamily="34" charset="-120"/>
+              </a:rPr>
+              <a:t>root</a:t>
+            </a:r>
+            <a:r>
+              <a:rPr lang="en-US" sz="1050" dirty="0">
+                <a:solidFill>
+                  <a:srgbClr val="556B82"/>
+                </a:solidFill>
+              </a:rPr>
+              <a:t> marca a raiz do BO Item (aula 01.08).</a:t>
             </a:r>
             <a:endParaRPr lang="en-US" sz="1400" dirty="0"/>
           </a:p>
@@ -5439,7 +5571,7 @@
                 <a:ea typeface="Courier New" pitchFamily="34" charset="-122"/>
                 <a:cs typeface="Courier New" pitchFamily="34" charset="-120"/>
               </a:rPr>
-              <a:t>as AirlineID</a:t>
+              <a:t>as QtdeDisponivel</a:t>
             </a:r>
             <a:r>
               <a:rPr lang="en-US" sz="1050" dirty="0">
@@ -5559,7 +5691,7 @@
                   <a:srgbClr val="556B82"/>
                 </a:solidFill>
               </a:rPr>
-              <a:t>Relação com </a:t>
+              <a:t>Relação com a lista de códigos </a:t>
             </a:r>
             <a:r>
               <a:rPr lang="en-US" sz="1050" dirty="0">
@@ -5570,7 +5702,7 @@
                 <a:ea typeface="Courier New" pitchFamily="34" charset="-122"/>
                 <a:cs typeface="Courier New" pitchFamily="34" charset="-120"/>
               </a:rPr>
-              <a:t>/DMO/I_Carrier</a:t>
+              <a:t>ZR_PC_CODELIST</a:t>
             </a:r>
             <a:r>
               <a:rPr lang="en-US" sz="1050" dirty="0">
@@ -5589,7 +5721,7 @@
                 <a:ea typeface="Courier New" pitchFamily="34" charset="-122"/>
                 <a:cs typeface="Courier New" pitchFamily="34" charset="-120"/>
               </a:rPr>
-              <a:t>_Airline</a:t>
+              <a:t>_CategoriaTxt</a:t>
             </a:r>
             <a:r>
               <a:rPr lang="en-US" sz="1050" dirty="0">
@@ -5943,7 +6075,7 @@
         <p:spPr>
           <a:xfrm>
             <a:off x="640080" y="1700784"/>
-            <a:ext cx="1920240" cy="292608"/>
+            <a:ext cx="2930652" cy="292608"/>
           </a:xfrm>
           <a:prstGeom prst="rect">
             <a:avLst/>
@@ -5963,7 +6095,7 @@
         <p:spPr>
           <a:xfrm>
             <a:off x="640080" y="1700784"/>
-            <a:ext cx="1920240" cy="27432"/>
+            <a:ext cx="2930652" cy="27432"/>
           </a:xfrm>
           <a:prstGeom prst="rect">
             <a:avLst/>
@@ -5983,7 +6115,7 @@
         <p:spPr>
           <a:xfrm>
             <a:off x="731520" y="1719072"/>
-            <a:ext cx="1737360" cy="274320"/>
+            <a:ext cx="2747772" cy="274320"/>
           </a:xfrm>
           <a:prstGeom prst="rect">
             <a:avLst/>
@@ -6004,7 +6136,7 @@
                   <a:srgbClr val="FFFFFF"/>
                 </a:solidFill>
               </a:rPr>
-              <a:t>zcl_04_cds.clas.abap</a:t>
+              <a:t>zcl_pc_consulta_estoque.clas.abap</a:t>
             </a:r>
             <a:endParaRPr lang="en-US" sz="950" dirty="0"/>
           </a:p>
@@ -6040,7 +6172,7 @@
                   <a:srgbClr val="9DA5B4"/>
                 </a:solidFill>
               </a:rPr>
-              <a:t>ZS4D400_## › ZCL_04_CDS › main</a:t>
+              <a:t>Exemplo sobre ZAVBS_PC_ESTOQUE › main</a:t>
             </a:r>
             <a:endParaRPr lang="en-US" sz="850" dirty="0"/>
           </a:p>
@@ -6206,26 +6338,6 @@
             </a:r>
             <a:endParaRPr lang="en-US" sz="1050" dirty="0"/>
           </a:p>
-          <a:p>
-            <a:pPr algn="r" indent="0" marL="0">
-              <a:lnSpc>
-                <a:spcPct val="105000"/>
-              </a:lnSpc>
-              <a:buNone/>
-            </a:pPr>
-            <a:r>
-              <a:rPr lang="en-US" sz="1050" dirty="0">
-                <a:solidFill>
-                  <a:srgbClr val="6E7681"/>
-                </a:solidFill>
-                <a:latin typeface="Courier New" pitchFamily="34" charset="0"/>
-                <a:ea typeface="Courier New" pitchFamily="34" charset="-122"/>
-                <a:cs typeface="Courier New" pitchFamily="34" charset="-120"/>
-              </a:rPr>
-              <a:t>8</a:t>
-            </a:r>
-            <a:endParaRPr lang="en-US" sz="1050" dirty="0"/>
-          </a:p>
         </p:txBody>
       </p:sp>
       <p:sp>
@@ -6302,13 +6414,13 @@
             <a:r>
               <a:rPr lang="en-US" sz="1050" dirty="0">
                 <a:solidFill>
-                  <a:srgbClr val="4EC9B0"/>
-                </a:solidFill>
-                <a:latin typeface="Courier New" pitchFamily="34" charset="0"/>
-                <a:ea typeface="Courier New" pitchFamily="34" charset="-122"/>
-                <a:cs typeface="Courier New" pitchFamily="34" charset="-120"/>
-              </a:rPr>
-              <a:t>/DMO/I_Connection</a:t>
+                  <a:srgbClr val="CCCCCC"/>
+                </a:solidFill>
+                <a:latin typeface="Courier New" pitchFamily="34" charset="0"/>
+                <a:ea typeface="Courier New" pitchFamily="34" charset="-122"/>
+                <a:cs typeface="Courier New" pitchFamily="34" charset="-120"/>
+              </a:rPr>
+              <a:t>zr_pc_item</a:t>
             </a:r>
             <a:endParaRPr lang="en-US" sz="1050" dirty="0"/>
           </a:p>
@@ -6361,7 +6473,7 @@
                 <a:ea typeface="Courier New" pitchFamily="34" charset="-122"/>
                 <a:cs typeface="Courier New" pitchFamily="34" charset="-120"/>
               </a:rPr>
-              <a:t>AirlineID</a:t>
+              <a:t>Sku</a:t>
             </a:r>
             <a:r>
               <a:rPr lang="en-US" sz="1050" dirty="0">
@@ -6403,7 +6515,7 @@
                 <a:ea typeface="Courier New" pitchFamily="34" charset="-122"/>
                 <a:cs typeface="Courier New" pitchFamily="34" charset="-120"/>
               </a:rPr>
-              <a:t>ConnectionID</a:t>
+              <a:t>Nome</a:t>
             </a:r>
             <a:r>
               <a:rPr lang="en-US" sz="1050" dirty="0">
@@ -6456,7 +6568,7 @@
                 <a:ea typeface="Courier New" pitchFamily="34" charset="-122"/>
                 <a:cs typeface="Courier New" pitchFamily="34" charset="-120"/>
               </a:rPr>
-              <a:t>_Airline-Name</a:t>
+              <a:t>_CategoriaTxt-Descricao</a:t>
             </a:r>
             <a:r>
               <a:rPr lang="en-US" sz="1050" dirty="0">
@@ -6500,7 +6612,7 @@
                 <a:ea typeface="Courier New" pitchFamily="34" charset="-122"/>
                 <a:cs typeface="Courier New" pitchFamily="34" charset="-120"/>
               </a:rPr>
-              <a:t>AirlineName</a:t>
+              <a:t>Categoria</a:t>
             </a:r>
             <a:r>
               <a:rPr lang="en-US" sz="1050" dirty="0">
@@ -6542,18 +6654,7 @@
                 <a:ea typeface="Courier New" pitchFamily="34" charset="-122"/>
                 <a:cs typeface="Courier New" pitchFamily="34" charset="-120"/>
               </a:rPr>
-              <a:t>DepartureAirport</a:t>
-            </a:r>
-            <a:r>
-              <a:rPr lang="en-US" sz="1050" dirty="0">
-                <a:solidFill>
-                  <a:srgbClr val="CCCCCC"/>
-                </a:solidFill>
-                <a:latin typeface="Courier New" pitchFamily="34" charset="0"/>
-                <a:ea typeface="Courier New" pitchFamily="34" charset="-122"/>
-                <a:cs typeface="Courier New" pitchFamily="34" charset="-120"/>
-              </a:rPr>
-              <a:t>,</a:t>
+              <a:t>QtdeDisponivel</a:t>
             </a:r>
             <a:endParaRPr lang="en-US" sz="1050" dirty="0"/>
           </a:p>
@@ -6573,18 +6674,84 @@
                 <a:ea typeface="Courier New" pitchFamily="34" charset="-122"/>
                 <a:cs typeface="Courier New" pitchFamily="34" charset="-120"/>
               </a:rPr>
-              <a:t>         </a:t>
-            </a:r>
-            <a:r>
-              <a:rPr lang="en-US" sz="1050" dirty="0">
-                <a:solidFill>
-                  <a:srgbClr val="CCCCCC"/>
-                </a:solidFill>
-                <a:latin typeface="Courier New" pitchFamily="34" charset="0"/>
-                <a:ea typeface="Courier New" pitchFamily="34" charset="-122"/>
-                <a:cs typeface="Courier New" pitchFamily="34" charset="-120"/>
-              </a:rPr>
-              <a:t>DestinationAirport</a:t>
+              <a:t>  </a:t>
+            </a:r>
+            <a:r>
+              <a:rPr lang="en-US" sz="1050" dirty="0">
+                <a:solidFill>
+                  <a:srgbClr val="569CD6"/>
+                </a:solidFill>
+                <a:latin typeface="Courier New" pitchFamily="34" charset="0"/>
+                <a:ea typeface="Courier New" pitchFamily="34" charset="-122"/>
+                <a:cs typeface="Courier New" pitchFamily="34" charset="-120"/>
+              </a:rPr>
+              <a:t>WHERE</a:t>
+            </a:r>
+            <a:r>
+              <a:rPr lang="en-US" sz="1050" dirty="0">
+                <a:solidFill>
+                  <a:srgbClr val="CCCCCC"/>
+                </a:solidFill>
+                <a:latin typeface="Courier New" pitchFamily="34" charset="0"/>
+                <a:ea typeface="Courier New" pitchFamily="34" charset="-122"/>
+                <a:cs typeface="Courier New" pitchFamily="34" charset="-120"/>
+              </a:rPr>
+              <a:t> </a:t>
+            </a:r>
+            <a:r>
+              <a:rPr lang="en-US" sz="1050" dirty="0">
+                <a:solidFill>
+                  <a:srgbClr val="CCCCCC"/>
+                </a:solidFill>
+                <a:latin typeface="Courier New" pitchFamily="34" charset="0"/>
+                <a:ea typeface="Courier New" pitchFamily="34" charset="-122"/>
+                <a:cs typeface="Courier New" pitchFamily="34" charset="-120"/>
+              </a:rPr>
+              <a:t>QtdeDisponivel</a:t>
+            </a:r>
+            <a:r>
+              <a:rPr lang="en-US" sz="1050" dirty="0">
+                <a:solidFill>
+                  <a:srgbClr val="CCCCCC"/>
+                </a:solidFill>
+                <a:latin typeface="Courier New" pitchFamily="34" charset="0"/>
+                <a:ea typeface="Courier New" pitchFamily="34" charset="-122"/>
+                <a:cs typeface="Courier New" pitchFamily="34" charset="-120"/>
+              </a:rPr>
+              <a:t> </a:t>
+            </a:r>
+            <a:r>
+              <a:rPr lang="en-US" sz="1050" dirty="0">
+                <a:solidFill>
+                  <a:srgbClr val="CCCCCC"/>
+                </a:solidFill>
+                <a:latin typeface="Courier New" pitchFamily="34" charset="0"/>
+                <a:ea typeface="Courier New" pitchFamily="34" charset="-122"/>
+                <a:cs typeface="Courier New" pitchFamily="34" charset="-120"/>
+              </a:rPr>
+              <a:t>&gt;</a:t>
+            </a:r>
+            <a:r>
+              <a:rPr lang="en-US" sz="1050" dirty="0">
+                <a:solidFill>
+                  <a:srgbClr val="CCCCCC"/>
+                </a:solidFill>
+                <a:latin typeface="Courier New" pitchFamily="34" charset="0"/>
+                <a:ea typeface="Courier New" pitchFamily="34" charset="-122"/>
+                <a:cs typeface="Courier New" pitchFamily="34" charset="-120"/>
+              </a:rPr>
+              <a:t> </a:t>
+            </a:r>
+            <a:r>
+              <a:rPr lang="en-US" sz="1050" dirty="0">
+                <a:solidFill>
+                  <a:srgbClr val="B5CEA8"/>
+                </a:solidFill>
+                <a:latin typeface="Courier New" pitchFamily="34" charset="0"/>
+                <a:ea typeface="Courier New" pitchFamily="34" charset="-122"/>
+                <a:cs typeface="Courier New" pitchFamily="34" charset="-120"/>
+              </a:rPr>
+              <a:t>0</a:t>
             </a:r>
             <a:endParaRPr lang="en-US" sz="1050" dirty="0"/>
           </a:p>
@@ -6615,7 +6782,7 @@
                 <a:ea typeface="Courier New" pitchFamily="34" charset="-122"/>
                 <a:cs typeface="Courier New" pitchFamily="34" charset="-120"/>
               </a:rPr>
-              <a:t>WHERE</a:t>
+              <a:t>INTO</a:t>
             </a:r>
             <a:r>
               <a:rPr lang="en-US" sz="1050" dirty="0">
@@ -6631,13 +6798,13 @@
             <a:r>
               <a:rPr lang="en-US" sz="1050" dirty="0">
                 <a:solidFill>
-                  <a:srgbClr val="CCCCCC"/>
-                </a:solidFill>
-                <a:latin typeface="Courier New" pitchFamily="34" charset="0"/>
-                <a:ea typeface="Courier New" pitchFamily="34" charset="-122"/>
-                <a:cs typeface="Courier New" pitchFamily="34" charset="-120"/>
-              </a:rPr>
-              <a:t>AirlineID</a:t>
+                  <a:srgbClr val="569CD6"/>
+                </a:solidFill>
+                <a:latin typeface="Courier New" pitchFamily="34" charset="0"/>
+                <a:ea typeface="Courier New" pitchFamily="34" charset="-122"/>
+                <a:cs typeface="Courier New" pitchFamily="34" charset="-120"/>
+              </a:rPr>
+              <a:t>TABLE</a:t>
             </a:r>
             <a:r>
               <a:rPr lang="en-US" sz="1050" dirty="0">
@@ -6659,49 +6826,7 @@
                 <a:ea typeface="Courier New" pitchFamily="34" charset="-122"/>
                 <a:cs typeface="Courier New" pitchFamily="34" charset="-120"/>
               </a:rPr>
-              <a:t>=</a:t>
-            </a:r>
-            <a:r>
-              <a:rPr lang="en-US" sz="1050" dirty="0">
-                <a:solidFill>
-                  <a:srgbClr val="CCCCCC"/>
-                </a:solidFill>
-                <a:latin typeface="Courier New" pitchFamily="34" charset="0"/>
-                <a:ea typeface="Courier New" pitchFamily="34" charset="-122"/>
-                <a:cs typeface="Courier New" pitchFamily="34" charset="-120"/>
-              </a:rPr>
-              <a:t> </a:t>
-            </a:r>
-            <a:r>
-              <a:rPr lang="en-US" sz="1050" dirty="0">
-                <a:solidFill>
-                  <a:srgbClr val="CE9178"/>
-                </a:solidFill>
-                <a:latin typeface="Courier New" pitchFamily="34" charset="0"/>
-                <a:ea typeface="Courier New" pitchFamily="34" charset="-122"/>
-                <a:cs typeface="Courier New" pitchFamily="34" charset="-120"/>
-              </a:rPr>
-              <a:t>'LH'</a:t>
-            </a:r>
-            <a:endParaRPr lang="en-US" sz="1050" dirty="0"/>
-          </a:p>
-          <a:p>
-            <a:pPr indent="0" marL="0">
-              <a:lnSpc>
-                <a:spcPct val="105000"/>
-              </a:lnSpc>
-              <a:buNone/>
-            </a:pPr>
-            <a:r>
-              <a:rPr lang="en-US" sz="1050" dirty="0">
-                <a:solidFill>
-                  <a:srgbClr val="CCCCCC"/>
-                </a:solidFill>
-                <a:latin typeface="Courier New" pitchFamily="34" charset="0"/>
-                <a:ea typeface="Courier New" pitchFamily="34" charset="-122"/>
-                <a:cs typeface="Courier New" pitchFamily="34" charset="-120"/>
-              </a:rPr>
-              <a:t>  </a:t>
+              <a:t>@</a:t>
             </a:r>
             <a:r>
               <a:rPr lang="en-US" sz="1050" dirty="0">
@@ -6712,61 +6837,6 @@
                 <a:ea typeface="Courier New" pitchFamily="34" charset="-122"/>
                 <a:cs typeface="Courier New" pitchFamily="34" charset="-120"/>
               </a:rPr>
-              <a:t>INTO</a:t>
-            </a:r>
-            <a:r>
-              <a:rPr lang="en-US" sz="1050" dirty="0">
-                <a:solidFill>
-                  <a:srgbClr val="CCCCCC"/>
-                </a:solidFill>
-                <a:latin typeface="Courier New" pitchFamily="34" charset="0"/>
-                <a:ea typeface="Courier New" pitchFamily="34" charset="-122"/>
-                <a:cs typeface="Courier New" pitchFamily="34" charset="-120"/>
-              </a:rPr>
-              <a:t> </a:t>
-            </a:r>
-            <a:r>
-              <a:rPr lang="en-US" sz="1050" dirty="0">
-                <a:solidFill>
-                  <a:srgbClr val="569CD6"/>
-                </a:solidFill>
-                <a:latin typeface="Courier New" pitchFamily="34" charset="0"/>
-                <a:ea typeface="Courier New" pitchFamily="34" charset="-122"/>
-                <a:cs typeface="Courier New" pitchFamily="34" charset="-120"/>
-              </a:rPr>
-              <a:t>TABLE</a:t>
-            </a:r>
-            <a:r>
-              <a:rPr lang="en-US" sz="1050" dirty="0">
-                <a:solidFill>
-                  <a:srgbClr val="CCCCCC"/>
-                </a:solidFill>
-                <a:latin typeface="Courier New" pitchFamily="34" charset="0"/>
-                <a:ea typeface="Courier New" pitchFamily="34" charset="-122"/>
-                <a:cs typeface="Courier New" pitchFamily="34" charset="-120"/>
-              </a:rPr>
-              <a:t> </a:t>
-            </a:r>
-            <a:r>
-              <a:rPr lang="en-US" sz="1050" dirty="0">
-                <a:solidFill>
-                  <a:srgbClr val="CCCCCC"/>
-                </a:solidFill>
-                <a:latin typeface="Courier New" pitchFamily="34" charset="0"/>
-                <a:ea typeface="Courier New" pitchFamily="34" charset="-122"/>
-                <a:cs typeface="Courier New" pitchFamily="34" charset="-120"/>
-              </a:rPr>
-              <a:t>@</a:t>
-            </a:r>
-            <a:r>
-              <a:rPr lang="en-US" sz="1050" dirty="0">
-                <a:solidFill>
-                  <a:srgbClr val="569CD6"/>
-                </a:solidFill>
-                <a:latin typeface="Courier New" pitchFamily="34" charset="0"/>
-                <a:ea typeface="Courier New" pitchFamily="34" charset="-122"/>
-                <a:cs typeface="Courier New" pitchFamily="34" charset="-120"/>
-              </a:rPr>
               <a:t>DATA</a:t>
             </a:r>
             <a:r>
@@ -6789,7 +6859,7 @@
                 <a:ea typeface="Courier New" pitchFamily="34" charset="-122"/>
                 <a:cs typeface="Courier New" pitchFamily="34" charset="-120"/>
               </a:rPr>
-              <a:t>connections</a:t>
+              <a:t>itens</a:t>
             </a:r>
             <a:r>
               <a:rPr lang="en-US" sz="1050" dirty="0">
@@ -7090,7 +7160,7 @@
                 <a:ea typeface="Courier New" pitchFamily="34" charset="-122"/>
                 <a:cs typeface="Courier New" pitchFamily="34" charset="-120"/>
               </a:rPr>
-              <a:t>\_Airline-Name</a:t>
+              <a:t>\_CategoriaTxt-Descricao</a:t>
             </a:r>
             <a:endParaRPr lang="en-US" sz="1400" dirty="0"/>
           </a:p>
@@ -7104,26 +7174,7 @@
                   <a:srgbClr val="556B82"/>
                 </a:solidFill>
               </a:rPr>
-              <a:t>Path expression: lê </a:t>
-            </a:r>
-            <a:r>
-              <a:rPr lang="en-US" sz="1050" dirty="0">
-                <a:solidFill>
-                  <a:srgbClr val="0064D9"/>
-                </a:solidFill>
-                <a:latin typeface="Courier New" pitchFamily="34" charset="0"/>
-                <a:ea typeface="Courier New" pitchFamily="34" charset="-122"/>
-                <a:cs typeface="Courier New" pitchFamily="34" charset="-120"/>
-              </a:rPr>
-              <a:t>Name</a:t>
-            </a:r>
-            <a:r>
-              <a:rPr lang="en-US" sz="1050" dirty="0">
-                <a:solidFill>
-                  <a:srgbClr val="556B82"/>
-                </a:solidFill>
-              </a:rPr>
-              <a:t> da view associada. A barra invertida é obrigatória.</a:t>
+              <a:t>Path expression: lê a descrição da categoria na view associada. A barra invertida é obrigatória.</a:t>
             </a:r>
             <a:endParaRPr lang="en-US" sz="1400" dirty="0"/>
           </a:p>
@@ -7855,7 +7906,7 @@
                 <a:ea typeface="Courier New" pitchFamily="34" charset="-122"/>
                 <a:cs typeface="Courier New" pitchFamily="34" charset="-120"/>
               </a:rPr>
-              <a:t>DepartureAirport</a:t>
+              <a:t>QtdeDisponivel</a:t>
             </a:r>
             <a:r>
               <a:rPr lang="en-US" sz="1200" dirty="0">
@@ -7863,7 +7914,7 @@
                   <a:srgbClr val="556B82"/>
                 </a:solidFill>
               </a:rPr>
-              <a:t> comunica mais que </a:t>
+              <a:t> segue o padrão dos serviços OData, em vez de </a:t>
             </a:r>
             <a:r>
               <a:rPr lang="en-US" sz="1200" dirty="0">
@@ -7874,7 +7925,7 @@
                 <a:ea typeface="Courier New" pitchFamily="34" charset="-122"/>
                 <a:cs typeface="Courier New" pitchFamily="34" charset="-120"/>
               </a:rPr>
-              <a:t>airport_from_id</a:t>
+              <a:t>qtde_disponivel</a:t>
             </a:r>
             <a:r>
               <a:rPr lang="en-US" sz="1200" dirty="0">
@@ -8032,7 +8083,7 @@
         </p:blipFill>
         <p:spPr>
           <a:xfrm>
-            <a:off x="6511900" y="3168396"/>
+            <a:off x="850392" y="3168396"/>
             <a:ext cx="256032" cy="256032"/>
           </a:xfrm>
           <a:prstGeom prst="rect">
@@ -8056,7 +8107,7 @@
         </p:blipFill>
         <p:spPr>
           <a:xfrm>
-            <a:off x="850392" y="3168396"/>
+            <a:off x="6511900" y="3168396"/>
             <a:ext cx="256032" cy="256032"/>
           </a:xfrm>
           <a:prstGeom prst="rect">
@@ -8080,7 +8131,7 @@
         </p:blipFill>
         <p:spPr>
           <a:xfrm>
-            <a:off x="3681146" y="3168396"/>
+            <a:off x="9342653" y="3168396"/>
             <a:ext cx="256032" cy="256032"/>
           </a:xfrm>
           <a:prstGeom prst="rect">
@@ -8104,7 +8155,7 @@
         </p:blipFill>
         <p:spPr>
           <a:xfrm>
-            <a:off x="9342653" y="3168396"/>
+            <a:off x="3681146" y="3168396"/>
             <a:ext cx="256032" cy="256032"/>
           </a:xfrm>
           <a:prstGeom prst="rect">
@@ -9310,7 +9361,7 @@
                   <a:srgbClr val="1D2D3E"/>
                 </a:solidFill>
               </a:rPr>
-              <a:t>o SQL Trace mostra quantas vezes cada tabela foi acessada (aula 04.01).</a:t>
+              <a:t>o SQL Trace mostra quantas vezes cada tabela foi acessada (aula 02.01).</a:t>
             </a:r>
             <a:endParaRPr lang="en-US" sz="1400" dirty="0"/>
           </a:p>
@@ -9356,8 +9407,8 @@
         </p:blipFill>
         <p:spPr>
           <a:xfrm>
-            <a:off x="749808" y="5124069"/>
-            <a:ext cx="310896" cy="310896"/>
+            <a:off x="6562192" y="2630043"/>
+            <a:ext cx="256032" cy="256032"/>
           </a:xfrm>
           <a:prstGeom prst="rect">
             <a:avLst/>
@@ -9380,8 +9431,8 @@
         </p:blipFill>
         <p:spPr>
           <a:xfrm>
-            <a:off x="6562192" y="2630043"/>
-            <a:ext cx="256032" cy="256032"/>
+            <a:off x="749808" y="5124069"/>
+            <a:ext cx="310896" cy="310896"/>
           </a:xfrm>
           <a:prstGeom prst="rect">
             <a:avLst/>
@@ -10140,7 +10191,7 @@
         </p:blipFill>
         <p:spPr>
           <a:xfrm>
-            <a:off x="6355080" y="2926080"/>
+            <a:off x="822960" y="2926080"/>
             <a:ext cx="256032" cy="256032"/>
           </a:xfrm>
           <a:prstGeom prst="rect">
@@ -10164,7 +10215,7 @@
         </p:blipFill>
         <p:spPr>
           <a:xfrm>
-            <a:off x="822960" y="3886200"/>
+            <a:off x="6355080" y="2926080"/>
             <a:ext cx="256032" cy="256032"/>
           </a:xfrm>
           <a:prstGeom prst="rect">
@@ -10188,7 +10239,7 @@
         </p:blipFill>
         <p:spPr>
           <a:xfrm>
-            <a:off x="822960" y="2926080"/>
+            <a:off x="822960" y="3886200"/>
             <a:ext cx="256032" cy="256032"/>
           </a:xfrm>
           <a:prstGeom prst="rect">
@@ -11759,7 +11810,7 @@
                   <a:srgbClr val="1D2D3E"/>
                 </a:solidFill>
               </a:rPr>
-              <a:t>lemos os voos do cenário de referência </a:t>
+              <a:t>lemos os itens de estoque do projeto Pedidos de Compras, primeiro direto da tabela </a:t>
             </a:r>
             <a:r>
               <a:rPr lang="en-US" sz="1200" dirty="0">
@@ -11770,7 +11821,7 @@
                 <a:ea typeface="Courier New" pitchFamily="34" charset="-122"/>
                 <a:cs typeface="Courier New" pitchFamily="34" charset="-120"/>
               </a:rPr>
-              <a:t>/DMO/</a:t>
+              <a:t>zta_pc_item</a:t>
             </a:r>
             <a:r>
               <a:rPr lang="en-US" sz="1200" dirty="0">
@@ -11778,7 +11829,26 @@
                   <a:srgbClr val="1D2D3E"/>
                 </a:solidFill>
               </a:rPr>
-              <a:t> primeiro direto da tabela e depois por uma CDS view com associação.</a:t>
+              <a:t> e depois pela CDS view </a:t>
+            </a:r>
+            <a:r>
+              <a:rPr lang="en-US" sz="1200" dirty="0">
+                <a:solidFill>
+                  <a:srgbClr val="0064D9"/>
+                </a:solidFill>
+                <a:latin typeface="Courier New" pitchFamily="34" charset="0"/>
+                <a:ea typeface="Courier New" pitchFamily="34" charset="-122"/>
+                <a:cs typeface="Courier New" pitchFamily="34" charset="-120"/>
+              </a:rPr>
+              <a:t>ZR_PC_ITEM</a:t>
+            </a:r>
+            <a:r>
+              <a:rPr lang="en-US" sz="1200" dirty="0">
+                <a:solidFill>
+                  <a:srgbClr val="1D2D3E"/>
+                </a:solidFill>
+              </a:rPr>
+              <a:t>, com associação.</a:t>
             </a:r>
             <a:endParaRPr lang="en-US" sz="1400" dirty="0"/>
           </a:p>
@@ -11848,7 +11918,7 @@
         </p:blipFill>
         <p:spPr>
           <a:xfrm>
-            <a:off x="8275091" y="1847088"/>
+            <a:off x="2636444" y="3858768"/>
             <a:ext cx="347472" cy="347472"/>
           </a:xfrm>
           <a:prstGeom prst="rect">
@@ -11872,7 +11942,7 @@
         </p:blipFill>
         <p:spPr>
           <a:xfrm>
-            <a:off x="5455768" y="3858768"/>
+            <a:off x="8275091" y="1847088"/>
             <a:ext cx="347472" cy="347472"/>
           </a:xfrm>
           <a:prstGeom prst="rect">
@@ -11896,7 +11966,7 @@
         </p:blipFill>
         <p:spPr>
           <a:xfrm>
-            <a:off x="2636444" y="3858768"/>
+            <a:off x="5455768" y="3858768"/>
             <a:ext cx="347472" cy="347472"/>
           </a:xfrm>
           <a:prstGeom prst="rect">
@@ -11920,7 +11990,7 @@
         </p:blipFill>
         <p:spPr>
           <a:xfrm>
-            <a:off x="11094415" y="1847088"/>
+            <a:off x="8275091" y="3858768"/>
             <a:ext cx="347472" cy="347472"/>
           </a:xfrm>
           <a:prstGeom prst="rect">
@@ -11944,7 +12014,7 @@
         </p:blipFill>
         <p:spPr>
           <a:xfrm>
-            <a:off x="8275091" y="3858768"/>
+            <a:off x="11094415" y="1847088"/>
             <a:ext cx="347472" cy="347472"/>
           </a:xfrm>
           <a:prstGeom prst="rect">
@@ -12965,7 +13035,7 @@
         </p:blipFill>
         <p:spPr>
           <a:xfrm>
-            <a:off x="1598257" y="2084832"/>
+            <a:off x="4474731" y="2084832"/>
             <a:ext cx="365760" cy="365760"/>
           </a:xfrm>
           <a:prstGeom prst="rect">
@@ -12989,7 +13059,7 @@
         </p:blipFill>
         <p:spPr>
           <a:xfrm>
-            <a:off x="4474731" y="2084832"/>
+            <a:off x="1598257" y="2084832"/>
             <a:ext cx="365760" cy="365760"/>
           </a:xfrm>
           <a:prstGeom prst="rect">
@@ -13037,8 +13107,8 @@
         </p:blipFill>
         <p:spPr>
           <a:xfrm>
-            <a:off x="10227678" y="2084832"/>
-            <a:ext cx="365760" cy="365760"/>
+            <a:off x="820034" y="3928994"/>
+            <a:ext cx="225308" cy="225308"/>
           </a:xfrm>
           <a:prstGeom prst="rect">
             <a:avLst/>
@@ -13061,8 +13131,8 @@
         </p:blipFill>
         <p:spPr>
           <a:xfrm>
-            <a:off x="820034" y="3928994"/>
-            <a:ext cx="225308" cy="225308"/>
+            <a:off x="10227678" y="2084832"/>
+            <a:ext cx="365760" cy="365760"/>
           </a:xfrm>
           <a:prstGeom prst="rect">
             <a:avLst/>
@@ -13085,7 +13155,7 @@
         </p:blipFill>
         <p:spPr>
           <a:xfrm>
-            <a:off x="4594372" y="3928994"/>
+            <a:off x="8368711" y="3928994"/>
             <a:ext cx="225308" cy="225308"/>
           </a:xfrm>
           <a:prstGeom prst="rect">
@@ -13109,7 +13179,7 @@
         </p:blipFill>
         <p:spPr>
           <a:xfrm>
-            <a:off x="8368711" y="3928994"/>
+            <a:off x="4594372" y="3928994"/>
             <a:ext cx="225308" cy="225308"/>
           </a:xfrm>
           <a:prstGeom prst="rect">
@@ -13778,7 +13848,7 @@
         <p:spPr>
           <a:xfrm>
             <a:off x="640080" y="1700784"/>
-            <a:ext cx="2308860" cy="292608"/>
+            <a:ext cx="1997964" cy="292608"/>
           </a:xfrm>
           <a:prstGeom prst="rect">
             <a:avLst/>
@@ -13798,7 +13868,7 @@
         <p:spPr>
           <a:xfrm>
             <a:off x="640080" y="1700784"/>
-            <a:ext cx="2308860" cy="27432"/>
+            <a:ext cx="1997964" cy="27432"/>
           </a:xfrm>
           <a:prstGeom prst="rect">
             <a:avLst/>
@@ -13818,7 +13888,7 @@
         <p:spPr>
           <a:xfrm>
             <a:off x="731520" y="1719072"/>
-            <a:ext cx="2125980" cy="274320"/>
+            <a:ext cx="1815084" cy="274320"/>
           </a:xfrm>
           <a:prstGeom prst="rect">
             <a:avLst/>
@@ -13839,7 +13909,7 @@
                   <a:srgbClr val="FFFFFF"/>
                 </a:solidFill>
               </a:rPr>
-              <a:t>/dmo/connection.tabl.abap</a:t>
+              <a:t>zta_pc_item.tabl.abap</a:t>
             </a:r>
             <a:endParaRPr lang="en-US" sz="950" dirty="0"/>
           </a:p>
@@ -13875,7 +13945,7 @@
                   <a:srgbClr val="9DA5B4"/>
                 </a:solidFill>
               </a:rPr>
-              <a:t>/DMO/FLIGHT_LEGACY › /DMO/CONNECTION (simplificada)</a:t>
+              <a:t>ZAVBS_PC_ESTOQUE › ZTA_PC_ITEM (simplificada)</a:t>
             </a:r>
             <a:endParaRPr lang="en-US" sz="850" dirty="0"/>
           </a:p>
@@ -14243,7 +14313,7 @@
                 <a:ea typeface="Courier New" pitchFamily="34" charset="-122"/>
                 <a:cs typeface="Courier New" pitchFamily="34" charset="-120"/>
               </a:rPr>
-              <a:t>'Flight Reference Scenario: Connection'</a:t>
+              <a:t>'Tabela de Item'</a:t>
             </a:r>
             <a:endParaRPr lang="en-US" sz="1050" dirty="0"/>
           </a:p>
@@ -14499,7 +14569,7 @@
                 <a:ea typeface="Courier New" pitchFamily="34" charset="-122"/>
                 <a:cs typeface="Courier New" pitchFamily="34" charset="-120"/>
               </a:rPr>
-              <a:t>/dmo/connection</a:t>
+              <a:t>zta_pc_item</a:t>
             </a:r>
             <a:r>
               <a:rPr lang="en-US" sz="1050" dirty="0">
@@ -14585,7 +14655,7 @@
                 <a:ea typeface="Courier New" pitchFamily="34" charset="-122"/>
                 <a:cs typeface="Courier New" pitchFamily="34" charset="-120"/>
               </a:rPr>
-              <a:t>        </a:t>
+              <a:t>      </a:t>
             </a:r>
             <a:r>
               <a:rPr lang="en-US" sz="1050" dirty="0">
@@ -14748,18 +14818,18 @@
                 <a:ea typeface="Courier New" pitchFamily="34" charset="-122"/>
                 <a:cs typeface="Courier New" pitchFamily="34" charset="-120"/>
               </a:rPr>
-              <a:t>carrier_id</a:t>
-            </a:r>
-            <a:r>
-              <a:rPr lang="en-US" sz="1050" dirty="0">
-                <a:solidFill>
-                  <a:srgbClr val="CCCCCC"/>
-                </a:solidFill>
-                <a:latin typeface="Courier New" pitchFamily="34" charset="0"/>
-                <a:ea typeface="Courier New" pitchFamily="34" charset="-122"/>
-                <a:cs typeface="Courier New" pitchFamily="34" charset="-120"/>
-              </a:rPr>
-              <a:t>    </a:t>
+              <a:t>item_uuid</a:t>
+            </a:r>
+            <a:r>
+              <a:rPr lang="en-US" sz="1050" dirty="0">
+                <a:solidFill>
+                  <a:srgbClr val="CCCCCC"/>
+                </a:solidFill>
+                <a:latin typeface="Courier New" pitchFamily="34" charset="0"/>
+                <a:ea typeface="Courier New" pitchFamily="34" charset="-122"/>
+                <a:cs typeface="Courier New" pitchFamily="34" charset="-120"/>
+              </a:rPr>
+              <a:t>   </a:t>
             </a:r>
             <a:r>
               <a:rPr lang="en-US" sz="1050" dirty="0">
@@ -14792,7 +14862,7 @@
                 <a:ea typeface="Courier New" pitchFamily="34" charset="-122"/>
                 <a:cs typeface="Courier New" pitchFamily="34" charset="-120"/>
               </a:rPr>
-              <a:t>/dmo/carrier_id</a:t>
+              <a:t>sysuuid_x16</a:t>
             </a:r>
             <a:r>
               <a:rPr lang="en-US" sz="1050" dirty="0">
@@ -14872,13 +14942,35 @@
             <a:r>
               <a:rPr lang="en-US" sz="1050" dirty="0">
                 <a:solidFill>
-                  <a:srgbClr val="569CD6"/>
-                </a:solidFill>
-                <a:latin typeface="Courier New" pitchFamily="34" charset="0"/>
-                <a:ea typeface="Courier New" pitchFamily="34" charset="-122"/>
-                <a:cs typeface="Courier New" pitchFamily="34" charset="-120"/>
-              </a:rPr>
-              <a:t>key</a:t>
+                  <a:srgbClr val="CCCCCC"/>
+                </a:solidFill>
+                <a:latin typeface="Courier New" pitchFamily="34" charset="0"/>
+                <a:ea typeface="Courier New" pitchFamily="34" charset="-122"/>
+                <a:cs typeface="Courier New" pitchFamily="34" charset="-120"/>
+              </a:rPr>
+              <a:t>sku</a:t>
+            </a:r>
+            <a:r>
+              <a:rPr lang="en-US" sz="1050" dirty="0">
+                <a:solidFill>
+                  <a:srgbClr val="CCCCCC"/>
+                </a:solidFill>
+                <a:latin typeface="Courier New" pitchFamily="34" charset="0"/>
+                <a:ea typeface="Courier New" pitchFamily="34" charset="-122"/>
+                <a:cs typeface="Courier New" pitchFamily="34" charset="-120"/>
+              </a:rPr>
+              <a:t>             </a:t>
+            </a:r>
+            <a:r>
+              <a:rPr lang="en-US" sz="1050" dirty="0">
+                <a:solidFill>
+                  <a:srgbClr val="CCCCCC"/>
+                </a:solidFill>
+                <a:latin typeface="Courier New" pitchFamily="34" charset="0"/>
+                <a:ea typeface="Courier New" pitchFamily="34" charset="-122"/>
+                <a:cs typeface="Courier New" pitchFamily="34" charset="-120"/>
+              </a:rPr>
+              <a:t>:</a:t>
             </a:r>
             <a:r>
               <a:rPr lang="en-US" sz="1050" dirty="0">
@@ -14900,95 +14992,62 @@
                 <a:ea typeface="Courier New" pitchFamily="34" charset="-122"/>
                 <a:cs typeface="Courier New" pitchFamily="34" charset="-120"/>
               </a:rPr>
-              <a:t>connection_id</a:t>
-            </a:r>
-            <a:r>
-              <a:rPr lang="en-US" sz="1050" dirty="0">
-                <a:solidFill>
-                  <a:srgbClr val="CCCCCC"/>
-                </a:solidFill>
-                <a:latin typeface="Courier New" pitchFamily="34" charset="0"/>
-                <a:ea typeface="Courier New" pitchFamily="34" charset="-122"/>
-                <a:cs typeface="Courier New" pitchFamily="34" charset="-120"/>
-              </a:rPr>
-              <a:t> </a:t>
-            </a:r>
-            <a:r>
-              <a:rPr lang="en-US" sz="1050" dirty="0">
-                <a:solidFill>
-                  <a:srgbClr val="CCCCCC"/>
-                </a:solidFill>
-                <a:latin typeface="Courier New" pitchFamily="34" charset="0"/>
-                <a:ea typeface="Courier New" pitchFamily="34" charset="-122"/>
-                <a:cs typeface="Courier New" pitchFamily="34" charset="-120"/>
-              </a:rPr>
-              <a:t>:</a:t>
-            </a:r>
-            <a:r>
-              <a:rPr lang="en-US" sz="1050" dirty="0">
-                <a:solidFill>
-                  <a:srgbClr val="CCCCCC"/>
-                </a:solidFill>
-                <a:latin typeface="Courier New" pitchFamily="34" charset="0"/>
-                <a:ea typeface="Courier New" pitchFamily="34" charset="-122"/>
-                <a:cs typeface="Courier New" pitchFamily="34" charset="-120"/>
-              </a:rPr>
-              <a:t> </a:t>
-            </a:r>
-            <a:r>
-              <a:rPr lang="en-US" sz="1050" dirty="0">
-                <a:solidFill>
-                  <a:srgbClr val="CCCCCC"/>
-                </a:solidFill>
-                <a:latin typeface="Courier New" pitchFamily="34" charset="0"/>
-                <a:ea typeface="Courier New" pitchFamily="34" charset="-122"/>
-                <a:cs typeface="Courier New" pitchFamily="34" charset="-120"/>
-              </a:rPr>
-              <a:t>/dmo/connection_id</a:t>
-            </a:r>
-            <a:r>
-              <a:rPr lang="en-US" sz="1050" dirty="0">
-                <a:solidFill>
-                  <a:srgbClr val="CCCCCC"/>
-                </a:solidFill>
-                <a:latin typeface="Courier New" pitchFamily="34" charset="0"/>
-                <a:ea typeface="Courier New" pitchFamily="34" charset="-122"/>
-                <a:cs typeface="Courier New" pitchFamily="34" charset="-120"/>
-              </a:rPr>
-              <a:t> </a:t>
-            </a:r>
-            <a:r>
-              <a:rPr lang="en-US" sz="1050" dirty="0">
-                <a:solidFill>
-                  <a:srgbClr val="569CD6"/>
-                </a:solidFill>
-                <a:latin typeface="Courier New" pitchFamily="34" charset="0"/>
-                <a:ea typeface="Courier New" pitchFamily="34" charset="-122"/>
-                <a:cs typeface="Courier New" pitchFamily="34" charset="-120"/>
-              </a:rPr>
-              <a:t>not</a:t>
-            </a:r>
-            <a:r>
-              <a:rPr lang="en-US" sz="1050" dirty="0">
-                <a:solidFill>
-                  <a:srgbClr val="CCCCCC"/>
-                </a:solidFill>
-                <a:latin typeface="Courier New" pitchFamily="34" charset="0"/>
-                <a:ea typeface="Courier New" pitchFamily="34" charset="-122"/>
-                <a:cs typeface="Courier New" pitchFamily="34" charset="-120"/>
-              </a:rPr>
-              <a:t> </a:t>
-            </a:r>
-            <a:r>
-              <a:rPr lang="en-US" sz="1050" dirty="0">
-                <a:solidFill>
-                  <a:srgbClr val="569CD6"/>
-                </a:solidFill>
-                <a:latin typeface="Courier New" pitchFamily="34" charset="0"/>
-                <a:ea typeface="Courier New" pitchFamily="34" charset="-122"/>
-                <a:cs typeface="Courier New" pitchFamily="34" charset="-120"/>
-              </a:rPr>
-              <a:t>null</a:t>
+              <a:t>abap</a:t>
+            </a:r>
+            <a:r>
+              <a:rPr lang="en-US" sz="1050" dirty="0">
+                <a:solidFill>
+                  <a:srgbClr val="CCCCCC"/>
+                </a:solidFill>
+                <a:latin typeface="Courier New" pitchFamily="34" charset="0"/>
+                <a:ea typeface="Courier New" pitchFamily="34" charset="-122"/>
+                <a:cs typeface="Courier New" pitchFamily="34" charset="-120"/>
+              </a:rPr>
+              <a:t>.</a:t>
+            </a:r>
+            <a:r>
+              <a:rPr lang="en-US" sz="1050" dirty="0">
+                <a:solidFill>
+                  <a:srgbClr val="DCDCAA"/>
+                </a:solidFill>
+                <a:latin typeface="Courier New" pitchFamily="34" charset="0"/>
+                <a:ea typeface="Courier New" pitchFamily="34" charset="-122"/>
+                <a:cs typeface="Courier New" pitchFamily="34" charset="-120"/>
+              </a:rPr>
+              <a:t>char</a:t>
+            </a:r>
+            <a:r>
+              <a:rPr lang="en-US" sz="1050" dirty="0">
+                <a:solidFill>
+                  <a:srgbClr val="CCCCCC"/>
+                </a:solidFill>
+                <a:latin typeface="Courier New" pitchFamily="34" charset="0"/>
+                <a:ea typeface="Courier New" pitchFamily="34" charset="-122"/>
+                <a:cs typeface="Courier New" pitchFamily="34" charset="-120"/>
+              </a:rPr>
+              <a:t>(</a:t>
+            </a:r>
+            <a:r>
+              <a:rPr lang="en-US" sz="1050" dirty="0">
+                <a:solidFill>
+                  <a:srgbClr val="B5CEA8"/>
+                </a:solidFill>
+                <a:latin typeface="Courier New" pitchFamily="34" charset="0"/>
+                <a:ea typeface="Courier New" pitchFamily="34" charset="-122"/>
+                <a:cs typeface="Courier New" pitchFamily="34" charset="-120"/>
+              </a:rPr>
+              <a:t>21</a:t>
+            </a:r>
+            <a:r>
+              <a:rPr lang="en-US" sz="1050" dirty="0">
+                <a:solidFill>
+                  <a:srgbClr val="CCCCCC"/>
+                </a:solidFill>
+                <a:latin typeface="Courier New" pitchFamily="34" charset="0"/>
+                <a:ea typeface="Courier New" pitchFamily="34" charset="-122"/>
+                <a:cs typeface="Courier New" pitchFamily="34" charset="-120"/>
+              </a:rPr>
+              <a:t>)</a:t>
             </a:r>
             <a:r>
               <a:rPr lang="en-US" sz="1050" dirty="0">
@@ -15030,18 +15089,18 @@
                 <a:ea typeface="Courier New" pitchFamily="34" charset="-122"/>
                 <a:cs typeface="Courier New" pitchFamily="34" charset="-120"/>
               </a:rPr>
-              <a:t>airport_from_id</a:t>
-            </a:r>
-            <a:r>
-              <a:rPr lang="en-US" sz="1050" dirty="0">
-                <a:solidFill>
-                  <a:srgbClr val="CCCCCC"/>
-                </a:solidFill>
-                <a:latin typeface="Courier New" pitchFamily="34" charset="0"/>
-                <a:ea typeface="Courier New" pitchFamily="34" charset="-122"/>
-                <a:cs typeface="Courier New" pitchFamily="34" charset="-120"/>
-              </a:rPr>
-              <a:t>   </a:t>
+              <a:t>nome</a:t>
+            </a:r>
+            <a:r>
+              <a:rPr lang="en-US" sz="1050" dirty="0">
+                <a:solidFill>
+                  <a:srgbClr val="CCCCCC"/>
+                </a:solidFill>
+                <a:latin typeface="Courier New" pitchFamily="34" charset="0"/>
+                <a:ea typeface="Courier New" pitchFamily="34" charset="-122"/>
+                <a:cs typeface="Courier New" pitchFamily="34" charset="-120"/>
+              </a:rPr>
+              <a:t>            </a:t>
             </a:r>
             <a:r>
               <a:rPr lang="en-US" sz="1050" dirty="0">
@@ -15074,7 +15133,62 @@
                 <a:ea typeface="Courier New" pitchFamily="34" charset="-122"/>
                 <a:cs typeface="Courier New" pitchFamily="34" charset="-120"/>
               </a:rPr>
-              <a:t>/dmo/airport_from_id</a:t>
+              <a:t>abap</a:t>
+            </a:r>
+            <a:r>
+              <a:rPr lang="en-US" sz="1050" dirty="0">
+                <a:solidFill>
+                  <a:srgbClr val="CCCCCC"/>
+                </a:solidFill>
+                <a:latin typeface="Courier New" pitchFamily="34" charset="0"/>
+                <a:ea typeface="Courier New" pitchFamily="34" charset="-122"/>
+                <a:cs typeface="Courier New" pitchFamily="34" charset="-120"/>
+              </a:rPr>
+              <a:t>.</a:t>
+            </a:r>
+            <a:r>
+              <a:rPr lang="en-US" sz="1050" dirty="0">
+                <a:solidFill>
+                  <a:srgbClr val="DCDCAA"/>
+                </a:solidFill>
+                <a:latin typeface="Courier New" pitchFamily="34" charset="0"/>
+                <a:ea typeface="Courier New" pitchFamily="34" charset="-122"/>
+                <a:cs typeface="Courier New" pitchFamily="34" charset="-120"/>
+              </a:rPr>
+              <a:t>char</a:t>
+            </a:r>
+            <a:r>
+              <a:rPr lang="en-US" sz="1050" dirty="0">
+                <a:solidFill>
+                  <a:srgbClr val="CCCCCC"/>
+                </a:solidFill>
+                <a:latin typeface="Courier New" pitchFamily="34" charset="0"/>
+                <a:ea typeface="Courier New" pitchFamily="34" charset="-122"/>
+                <a:cs typeface="Courier New" pitchFamily="34" charset="-120"/>
+              </a:rPr>
+              <a:t>(</a:t>
+            </a:r>
+            <a:r>
+              <a:rPr lang="en-US" sz="1050" dirty="0">
+                <a:solidFill>
+                  <a:srgbClr val="B5CEA8"/>
+                </a:solidFill>
+                <a:latin typeface="Courier New" pitchFamily="34" charset="0"/>
+                <a:ea typeface="Courier New" pitchFamily="34" charset="-122"/>
+                <a:cs typeface="Courier New" pitchFamily="34" charset="-120"/>
+              </a:rPr>
+              <a:t>120</a:t>
+            </a:r>
+            <a:r>
+              <a:rPr lang="en-US" sz="1050" dirty="0">
+                <a:solidFill>
+                  <a:srgbClr val="CCCCCC"/>
+                </a:solidFill>
+                <a:latin typeface="Courier New" pitchFamily="34" charset="0"/>
+                <a:ea typeface="Courier New" pitchFamily="34" charset="-122"/>
+                <a:cs typeface="Courier New" pitchFamily="34" charset="-120"/>
+              </a:rPr>
+              <a:t>)</a:t>
             </a:r>
             <a:r>
               <a:rPr lang="en-US" sz="1050" dirty="0">
@@ -15116,18 +15230,18 @@
                 <a:ea typeface="Courier New" pitchFamily="34" charset="-122"/>
                 <a:cs typeface="Courier New" pitchFamily="34" charset="-120"/>
               </a:rPr>
-              <a:t>airport_to_id</a:t>
-            </a:r>
-            <a:r>
-              <a:rPr lang="en-US" sz="1050" dirty="0">
-                <a:solidFill>
-                  <a:srgbClr val="CCCCCC"/>
-                </a:solidFill>
-                <a:latin typeface="Courier New" pitchFamily="34" charset="0"/>
-                <a:ea typeface="Courier New" pitchFamily="34" charset="-122"/>
-                <a:cs typeface="Courier New" pitchFamily="34" charset="-120"/>
-              </a:rPr>
-              <a:t>     </a:t>
+              <a:t>categoria</a:t>
+            </a:r>
+            <a:r>
+              <a:rPr lang="en-US" sz="1050" dirty="0">
+                <a:solidFill>
+                  <a:srgbClr val="CCCCCC"/>
+                </a:solidFill>
+                <a:latin typeface="Courier New" pitchFamily="34" charset="0"/>
+                <a:ea typeface="Courier New" pitchFamily="34" charset="-122"/>
+                <a:cs typeface="Courier New" pitchFamily="34" charset="-120"/>
+              </a:rPr>
+              <a:t>       </a:t>
             </a:r>
             <a:r>
               <a:rPr lang="en-US" sz="1050" dirty="0">
@@ -15160,7 +15274,62 @@
                 <a:ea typeface="Courier New" pitchFamily="34" charset="-122"/>
                 <a:cs typeface="Courier New" pitchFamily="34" charset="-120"/>
               </a:rPr>
-              <a:t>/dmo/airport_to_id</a:t>
+              <a:t>abap</a:t>
+            </a:r>
+            <a:r>
+              <a:rPr lang="en-US" sz="1050" dirty="0">
+                <a:solidFill>
+                  <a:srgbClr val="CCCCCC"/>
+                </a:solidFill>
+                <a:latin typeface="Courier New" pitchFamily="34" charset="0"/>
+                <a:ea typeface="Courier New" pitchFamily="34" charset="-122"/>
+                <a:cs typeface="Courier New" pitchFamily="34" charset="-120"/>
+              </a:rPr>
+              <a:t>.</a:t>
+            </a:r>
+            <a:r>
+              <a:rPr lang="en-US" sz="1050" dirty="0">
+                <a:solidFill>
+                  <a:srgbClr val="DCDCAA"/>
+                </a:solidFill>
+                <a:latin typeface="Courier New" pitchFamily="34" charset="0"/>
+                <a:ea typeface="Courier New" pitchFamily="34" charset="-122"/>
+                <a:cs typeface="Courier New" pitchFamily="34" charset="-120"/>
+              </a:rPr>
+              <a:t>char</a:t>
+            </a:r>
+            <a:r>
+              <a:rPr lang="en-US" sz="1050" dirty="0">
+                <a:solidFill>
+                  <a:srgbClr val="CCCCCC"/>
+                </a:solidFill>
+                <a:latin typeface="Courier New" pitchFamily="34" charset="0"/>
+                <a:ea typeface="Courier New" pitchFamily="34" charset="-122"/>
+                <a:cs typeface="Courier New" pitchFamily="34" charset="-120"/>
+              </a:rPr>
+              <a:t>(</a:t>
+            </a:r>
+            <a:r>
+              <a:rPr lang="en-US" sz="1050" dirty="0">
+                <a:solidFill>
+                  <a:srgbClr val="B5CEA8"/>
+                </a:solidFill>
+                <a:latin typeface="Courier New" pitchFamily="34" charset="0"/>
+                <a:ea typeface="Courier New" pitchFamily="34" charset="-122"/>
+                <a:cs typeface="Courier New" pitchFamily="34" charset="-120"/>
+              </a:rPr>
+              <a:t>30</a:t>
+            </a:r>
+            <a:r>
+              <a:rPr lang="en-US" sz="1050" dirty="0">
+                <a:solidFill>
+                  <a:srgbClr val="CCCCCC"/>
+                </a:solidFill>
+                <a:latin typeface="Courier New" pitchFamily="34" charset="0"/>
+                <a:ea typeface="Courier New" pitchFamily="34" charset="-122"/>
+                <a:cs typeface="Courier New" pitchFamily="34" charset="-120"/>
+              </a:rPr>
+              <a:t>)</a:t>
             </a:r>
             <a:r>
               <a:rPr lang="en-US" sz="1050" dirty="0">
@@ -15202,7 +15371,7 @@
                 <a:ea typeface="Courier New" pitchFamily="34" charset="-122"/>
                 <a:cs typeface="Courier New" pitchFamily="34" charset="-120"/>
               </a:rPr>
-              <a:t>departure_time</a:t>
+              <a:t>qtde_estoque</a:t>
             </a:r>
             <a:r>
               <a:rPr lang="en-US" sz="1050" dirty="0">
@@ -15246,7 +15415,29 @@
                 <a:ea typeface="Courier New" pitchFamily="34" charset="-122"/>
                 <a:cs typeface="Courier New" pitchFamily="34" charset="-120"/>
               </a:rPr>
-              <a:t>/dmo/flight_departure_time</a:t>
+              <a:t>abap</a:t>
+            </a:r>
+            <a:r>
+              <a:rPr lang="en-US" sz="1050" dirty="0">
+                <a:solidFill>
+                  <a:srgbClr val="CCCCCC"/>
+                </a:solidFill>
+                <a:latin typeface="Courier New" pitchFamily="34" charset="0"/>
+                <a:ea typeface="Courier New" pitchFamily="34" charset="-122"/>
+                <a:cs typeface="Courier New" pitchFamily="34" charset="-120"/>
+              </a:rPr>
+              <a:t>.</a:t>
+            </a:r>
+            <a:r>
+              <a:rPr lang="en-US" sz="1050" dirty="0">
+                <a:solidFill>
+                  <a:srgbClr val="CCCCCC"/>
+                </a:solidFill>
+                <a:latin typeface="Courier New" pitchFamily="34" charset="0"/>
+                <a:ea typeface="Courier New" pitchFamily="34" charset="-122"/>
+                <a:cs typeface="Courier New" pitchFamily="34" charset="-120"/>
+              </a:rPr>
+              <a:t>int4</a:t>
             </a:r>
             <a:r>
               <a:rPr lang="en-US" sz="1050" dirty="0">
@@ -15288,18 +15479,18 @@
                 <a:ea typeface="Courier New" pitchFamily="34" charset="-122"/>
                 <a:cs typeface="Courier New" pitchFamily="34" charset="-120"/>
               </a:rPr>
-              <a:t>arrival_time</a:t>
-            </a:r>
-            <a:r>
-              <a:rPr lang="en-US" sz="1050" dirty="0">
-                <a:solidFill>
-                  <a:srgbClr val="CCCCCC"/>
-                </a:solidFill>
-                <a:latin typeface="Courier New" pitchFamily="34" charset="0"/>
-                <a:ea typeface="Courier New" pitchFamily="34" charset="-122"/>
-                <a:cs typeface="Courier New" pitchFamily="34" charset="-120"/>
-              </a:rPr>
-              <a:t>      </a:t>
+              <a:t>qtde_disponivel</a:t>
+            </a:r>
+            <a:r>
+              <a:rPr lang="en-US" sz="1050" dirty="0">
+                <a:solidFill>
+                  <a:srgbClr val="CCCCCC"/>
+                </a:solidFill>
+                <a:latin typeface="Courier New" pitchFamily="34" charset="0"/>
+                <a:ea typeface="Courier New" pitchFamily="34" charset="-122"/>
+                <a:cs typeface="Courier New" pitchFamily="34" charset="-120"/>
+              </a:rPr>
+              <a:t> </a:t>
             </a:r>
             <a:r>
               <a:rPr lang="en-US" sz="1050" dirty="0">
@@ -15332,7 +15523,29 @@
                 <a:ea typeface="Courier New" pitchFamily="34" charset="-122"/>
                 <a:cs typeface="Courier New" pitchFamily="34" charset="-120"/>
               </a:rPr>
-              <a:t>/dmo/flight_arrival_time</a:t>
+              <a:t>abap</a:t>
+            </a:r>
+            <a:r>
+              <a:rPr lang="en-US" sz="1050" dirty="0">
+                <a:solidFill>
+                  <a:srgbClr val="CCCCCC"/>
+                </a:solidFill>
+                <a:latin typeface="Courier New" pitchFamily="34" charset="0"/>
+                <a:ea typeface="Courier New" pitchFamily="34" charset="-122"/>
+                <a:cs typeface="Courier New" pitchFamily="34" charset="-120"/>
+              </a:rPr>
+              <a:t>.</a:t>
+            </a:r>
+            <a:r>
+              <a:rPr lang="en-US" sz="1050" dirty="0">
+                <a:solidFill>
+                  <a:srgbClr val="CCCCCC"/>
+                </a:solidFill>
+                <a:latin typeface="Courier New" pitchFamily="34" charset="0"/>
+                <a:ea typeface="Courier New" pitchFamily="34" charset="-122"/>
+                <a:cs typeface="Courier New" pitchFamily="34" charset="-120"/>
+              </a:rPr>
+              <a:t>int4</a:t>
             </a:r>
             <a:r>
               <a:rPr lang="en-US" sz="1050" dirty="0">
@@ -15503,29 +15716,21 @@
             <a:r>
               <a:rPr lang="en-US" sz="1050" dirty="0">
                 <a:solidFill>
+                  <a:srgbClr val="0064D9"/>
+                </a:solidFill>
+                <a:latin typeface="Courier New" pitchFamily="34" charset="0"/>
+                <a:ea typeface="Courier New" pitchFamily="34" charset="-122"/>
+                <a:cs typeface="Courier New" pitchFamily="34" charset="-120"/>
+              </a:rPr>
+              <a:t>item_uuid</a:t>
+            </a:r>
+            <a:r>
+              <a:rPr lang="en-US" sz="1050" dirty="0">
+                <a:solidFill>
                   <a:srgbClr val="556B82"/>
                 </a:solidFill>
               </a:rPr>
-              <a:t>As primeiras colunas (</a:t>
-            </a:r>
-            <a:r>
-              <a:rPr lang="en-US" sz="1050" dirty="0">
-                <a:solidFill>
-                  <a:srgbClr val="0064D9"/>
-                </a:solidFill>
-                <a:latin typeface="Courier New" pitchFamily="34" charset="0"/>
-                <a:ea typeface="Courier New" pitchFamily="34" charset="-122"/>
-                <a:cs typeface="Courier New" pitchFamily="34" charset="-120"/>
-              </a:rPr>
-              <a:t>key</a:t>
-            </a:r>
-            <a:r>
-              <a:rPr lang="en-US" sz="1050" dirty="0">
-                <a:solidFill>
-                  <a:srgbClr val="556B82"/>
-                </a:solidFill>
-              </a:rPr>
-              <a:t>) identificam cada linha de forma única.</a:t>
+              <a:t> identifica cada linha; o SKU é a chave que o usuário enxerga.</a:t>
             </a:r>
             <a:endParaRPr lang="en-US" sz="1400" dirty="0"/>
           </a:p>
@@ -15732,7 +15937,7 @@
                   <a:srgbClr val="1D2D3E"/>
                 </a:solidFill>
               </a:rPr>
-              <a:t>Tipos do Dicionário</a:t>
+              <a:t>Tipos</a:t>
             </a:r>
             <a:endParaRPr lang="en-US" sz="1400" dirty="0"/>
           </a:p>
@@ -15746,7 +15951,45 @@
                   <a:srgbClr val="556B82"/>
                 </a:solidFill>
               </a:rPr>
-              <a:t>Cada campo usa um data element, com tipo técnico e rótulos.</a:t>
+              <a:t>Data elements (</a:t>
+            </a:r>
+            <a:r>
+              <a:rPr lang="en-US" sz="1050" dirty="0">
+                <a:solidFill>
+                  <a:srgbClr val="0064D9"/>
+                </a:solidFill>
+                <a:latin typeface="Courier New" pitchFamily="34" charset="0"/>
+                <a:ea typeface="Courier New" pitchFamily="34" charset="-122"/>
+                <a:cs typeface="Courier New" pitchFamily="34" charset="-120"/>
+              </a:rPr>
+              <a:t>sysuuid_x16</a:t>
+            </a:r>
+            <a:r>
+              <a:rPr lang="en-US" sz="1050" dirty="0">
+                <a:solidFill>
+                  <a:srgbClr val="556B82"/>
+                </a:solidFill>
+              </a:rPr>
+              <a:t>) ou tipos predefinidos (</a:t>
+            </a:r>
+            <a:r>
+              <a:rPr lang="en-US" sz="1050" dirty="0">
+                <a:solidFill>
+                  <a:srgbClr val="0064D9"/>
+                </a:solidFill>
+                <a:latin typeface="Courier New" pitchFamily="34" charset="0"/>
+                <a:ea typeface="Courier New" pitchFamily="34" charset="-122"/>
+                <a:cs typeface="Courier New" pitchFamily="34" charset="-120"/>
+              </a:rPr>
+              <a:t>abap.char(21)</a:t>
+            </a:r>
+            <a:r>
+              <a:rPr lang="en-US" sz="1050" dirty="0">
+                <a:solidFill>
+                  <a:srgbClr val="556B82"/>
+                </a:solidFill>
+              </a:rPr>
+              <a:t>).</a:t>
             </a:r>
             <a:endParaRPr lang="en-US" sz="1400" dirty="0"/>
           </a:p>
@@ -17641,7 +17884,7 @@
         <p:spPr>
           <a:xfrm>
             <a:off x="640080" y="1700784"/>
-            <a:ext cx="2153412" cy="292608"/>
+            <a:ext cx="2930652" cy="292608"/>
           </a:xfrm>
           <a:prstGeom prst="rect">
             <a:avLst/>
@@ -17661,7 +17904,7 @@
         <p:spPr>
           <a:xfrm>
             <a:off x="640080" y="1700784"/>
-            <a:ext cx="2153412" cy="27432"/>
+            <a:ext cx="2930652" cy="27432"/>
           </a:xfrm>
           <a:prstGeom prst="rect">
             <a:avLst/>
@@ -17681,7 +17924,7 @@
         <p:spPr>
           <a:xfrm>
             <a:off x="731520" y="1719072"/>
-            <a:ext cx="1970532" cy="274320"/>
+            <a:ext cx="2747772" cy="274320"/>
           </a:xfrm>
           <a:prstGeom prst="rect">
             <a:avLst/>
@@ -17702,7 +17945,7 @@
                   <a:srgbClr val="FFFFFF"/>
                 </a:solidFill>
               </a:rPr>
-              <a:t>zcl_04_select.clas.abap</a:t>
+              <a:t>zcl_pc_consulta_estoque.clas.abap</a:t>
             </a:r>
             <a:endParaRPr lang="en-US" sz="950" dirty="0"/>
           </a:p>
@@ -17738,7 +17981,7 @@
                   <a:srgbClr val="9DA5B4"/>
                 </a:solidFill>
               </a:rPr>
-              <a:t>ZS4D400_## › ZCL_04_SELECT › main</a:t>
+              <a:t>Exemplo sobre ZAVBS_PC_ESTOQUE › main</a:t>
             </a:r>
             <a:endParaRPr lang="en-US" sz="850" dirty="0"/>
           </a:p>
@@ -18044,26 +18287,6 @@
             </a:r>
             <a:endParaRPr lang="en-US" sz="1050" dirty="0"/>
           </a:p>
-          <a:p>
-            <a:pPr algn="r" indent="0" marL="0">
-              <a:lnSpc>
-                <a:spcPct val="105000"/>
-              </a:lnSpc>
-              <a:buNone/>
-            </a:pPr>
-            <a:r>
-              <a:rPr lang="en-US" sz="1050" dirty="0">
-                <a:solidFill>
-                  <a:srgbClr val="6E7681"/>
-                </a:solidFill>
-                <a:latin typeface="Courier New" pitchFamily="34" charset="0"/>
-                <a:ea typeface="Courier New" pitchFamily="34" charset="-122"/>
-                <a:cs typeface="Courier New" pitchFamily="34" charset="-120"/>
-              </a:rPr>
-              <a:t>15</a:t>
-            </a:r>
-            <a:endParaRPr lang="en-US" sz="1050" dirty="0"/>
-          </a:p>
         </p:txBody>
       </p:sp>
       <p:sp>
@@ -18124,7 +18347,29 @@
                 <a:ea typeface="Courier New" pitchFamily="34" charset="-122"/>
                 <a:cs typeface="Courier New" pitchFamily="34" charset="-120"/>
               </a:rPr>
-              <a:t>airport_from_id</a:t>
+              <a:t>nome</a:t>
+            </a:r>
+            <a:r>
+              <a:rPr lang="en-US" sz="1050" dirty="0">
+                <a:solidFill>
+                  <a:srgbClr val="CCCCCC"/>
+                </a:solidFill>
+                <a:latin typeface="Courier New" pitchFamily="34" charset="0"/>
+                <a:ea typeface="Courier New" pitchFamily="34" charset="-122"/>
+                <a:cs typeface="Courier New" pitchFamily="34" charset="-120"/>
+              </a:rPr>
+              <a:t>            </a:t>
+            </a:r>
+            <a:r>
+              <a:rPr lang="en-US" sz="1050" dirty="0">
+                <a:solidFill>
+                  <a:srgbClr val="569CD6"/>
+                </a:solidFill>
+                <a:latin typeface="Courier New" pitchFamily="34" charset="0"/>
+                <a:ea typeface="Courier New" pitchFamily="34" charset="-122"/>
+                <a:cs typeface="Courier New" pitchFamily="34" charset="-120"/>
+              </a:rPr>
+              <a:t>TYPE</a:t>
             </a:r>
             <a:r>
               <a:rPr lang="en-US" sz="1050" dirty="0">
@@ -18140,35 +18385,13 @@
             <a:r>
               <a:rPr lang="en-US" sz="1050" dirty="0">
                 <a:solidFill>
-                  <a:srgbClr val="569CD6"/>
-                </a:solidFill>
-                <a:latin typeface="Courier New" pitchFamily="34" charset="0"/>
-                <a:ea typeface="Courier New" pitchFamily="34" charset="-122"/>
-                <a:cs typeface="Courier New" pitchFamily="34" charset="-120"/>
-              </a:rPr>
-              <a:t>TYPE</a:t>
-            </a:r>
-            <a:r>
-              <a:rPr lang="en-US" sz="1050" dirty="0">
-                <a:solidFill>
-                  <a:srgbClr val="CCCCCC"/>
-                </a:solidFill>
-                <a:latin typeface="Courier New" pitchFamily="34" charset="0"/>
-                <a:ea typeface="Courier New" pitchFamily="34" charset="-122"/>
-                <a:cs typeface="Courier New" pitchFamily="34" charset="-120"/>
-              </a:rPr>
-              <a:t> </a:t>
-            </a:r>
-            <a:r>
-              <a:rPr lang="en-US" sz="1050" dirty="0">
-                <a:solidFill>
-                  <a:srgbClr val="4EC9B0"/>
-                </a:solidFill>
-                <a:latin typeface="Courier New" pitchFamily="34" charset="0"/>
-                <a:ea typeface="Courier New" pitchFamily="34" charset="-122"/>
-                <a:cs typeface="Courier New" pitchFamily="34" charset="-120"/>
-              </a:rPr>
-              <a:t>/dmo/airport_from_id</a:t>
+                  <a:srgbClr val="CCCCCC"/>
+                </a:solidFill>
+                <a:latin typeface="Courier New" pitchFamily="34" charset="0"/>
+                <a:ea typeface="Courier New" pitchFamily="34" charset="-122"/>
+                <a:cs typeface="Courier New" pitchFamily="34" charset="-120"/>
+              </a:rPr>
+              <a:t>zta_pc_item-nome</a:t>
             </a:r>
             <a:r>
               <a:rPr lang="en-US" sz="1050" dirty="0">
@@ -18221,18 +18444,18 @@
                 <a:ea typeface="Courier New" pitchFamily="34" charset="-122"/>
                 <a:cs typeface="Courier New" pitchFamily="34" charset="-120"/>
               </a:rPr>
-              <a:t>airport_to_id</a:t>
-            </a:r>
-            <a:r>
-              <a:rPr lang="en-US" sz="1050" dirty="0">
-                <a:solidFill>
-                  <a:srgbClr val="CCCCCC"/>
-                </a:solidFill>
-                <a:latin typeface="Courier New" pitchFamily="34" charset="0"/>
-                <a:ea typeface="Courier New" pitchFamily="34" charset="-122"/>
-                <a:cs typeface="Courier New" pitchFamily="34" charset="-120"/>
-              </a:rPr>
-              <a:t>   </a:t>
+              <a:t>qtde_disponivel</a:t>
+            </a:r>
+            <a:r>
+              <a:rPr lang="en-US" sz="1050" dirty="0">
+                <a:solidFill>
+                  <a:srgbClr val="CCCCCC"/>
+                </a:solidFill>
+                <a:latin typeface="Courier New" pitchFamily="34" charset="0"/>
+                <a:ea typeface="Courier New" pitchFamily="34" charset="-122"/>
+                <a:cs typeface="Courier New" pitchFamily="34" charset="-120"/>
+              </a:rPr>
+              <a:t> </a:t>
             </a:r>
             <a:r>
               <a:rPr lang="en-US" sz="1050" dirty="0">
@@ -18259,13 +18482,13 @@
             <a:r>
               <a:rPr lang="en-US" sz="1050" dirty="0">
                 <a:solidFill>
-                  <a:srgbClr val="4EC9B0"/>
-                </a:solidFill>
-                <a:latin typeface="Courier New" pitchFamily="34" charset="0"/>
-                <a:ea typeface="Courier New" pitchFamily="34" charset="-122"/>
-                <a:cs typeface="Courier New" pitchFamily="34" charset="-120"/>
-              </a:rPr>
-              <a:t>/dmo/airport_to_id</a:t>
+                  <a:srgbClr val="CCCCCC"/>
+                </a:solidFill>
+                <a:latin typeface="Courier New" pitchFamily="34" charset="0"/>
+                <a:ea typeface="Courier New" pitchFamily="34" charset="-122"/>
+                <a:cs typeface="Courier New" pitchFamily="34" charset="-120"/>
+              </a:rPr>
+              <a:t>zta_pc_item-qtde_disponivel</a:t>
             </a:r>
             <a:r>
               <a:rPr lang="en-US" sz="1050" dirty="0">
@@ -18385,13 +18608,13 @@
             <a:r>
               <a:rPr lang="en-US" sz="1050" dirty="0">
                 <a:solidFill>
-                  <a:srgbClr val="4EC9B0"/>
-                </a:solidFill>
-                <a:latin typeface="Courier New" pitchFamily="34" charset="0"/>
-                <a:ea typeface="Courier New" pitchFamily="34" charset="-122"/>
-                <a:cs typeface="Courier New" pitchFamily="34" charset="-120"/>
-              </a:rPr>
-              <a:t>/dmo/connection</a:t>
+                  <a:srgbClr val="CCCCCC"/>
+                </a:solidFill>
+                <a:latin typeface="Courier New" pitchFamily="34" charset="0"/>
+                <a:ea typeface="Courier New" pitchFamily="34" charset="-122"/>
+                <a:cs typeface="Courier New" pitchFamily="34" charset="-120"/>
+              </a:rPr>
+              <a:t>zta_pc_item</a:t>
             </a:r>
             <a:endParaRPr lang="en-US" sz="1050" dirty="0"/>
           </a:p>
@@ -18444,7 +18667,7 @@
                 <a:ea typeface="Courier New" pitchFamily="34" charset="-122"/>
                 <a:cs typeface="Courier New" pitchFamily="34" charset="-120"/>
               </a:rPr>
-              <a:t>airport_from_id</a:t>
+              <a:t>nome</a:t>
             </a:r>
             <a:r>
               <a:rPr lang="en-US" sz="1050" dirty="0">
@@ -18477,7 +18700,7 @@
                 <a:ea typeface="Courier New" pitchFamily="34" charset="-122"/>
                 <a:cs typeface="Courier New" pitchFamily="34" charset="-120"/>
               </a:rPr>
-              <a:t>airport_to_id</a:t>
+              <a:t>qtde_disponivel</a:t>
             </a:r>
             <a:endParaRPr lang="en-US" sz="1050" dirty="0"/>
           </a:p>
@@ -18530,18 +18753,18 @@
                 <a:ea typeface="Courier New" pitchFamily="34" charset="-122"/>
                 <a:cs typeface="Courier New" pitchFamily="34" charset="-120"/>
               </a:rPr>
-              <a:t>carrier_id</a:t>
-            </a:r>
-            <a:r>
-              <a:rPr lang="en-US" sz="1050" dirty="0">
-                <a:solidFill>
-                  <a:srgbClr val="CCCCCC"/>
-                </a:solidFill>
-                <a:latin typeface="Courier New" pitchFamily="34" charset="0"/>
-                <a:ea typeface="Courier New" pitchFamily="34" charset="-122"/>
-                <a:cs typeface="Courier New" pitchFamily="34" charset="-120"/>
-              </a:rPr>
-              <a:t>    </a:t>
+              <a:t>sku</a:t>
+            </a:r>
+            <a:r>
+              <a:rPr lang="en-US" sz="1050" dirty="0">
+                <a:solidFill>
+                  <a:srgbClr val="CCCCCC"/>
+                </a:solidFill>
+                <a:latin typeface="Courier New" pitchFamily="34" charset="0"/>
+                <a:ea typeface="Courier New" pitchFamily="34" charset="-122"/>
+                <a:cs typeface="Courier New" pitchFamily="34" charset="-120"/>
+              </a:rPr>
+              <a:t> </a:t>
             </a:r>
             <a:r>
               <a:rPr lang="en-US" sz="1050" dirty="0">
@@ -18574,7 +18797,7 @@
                 <a:ea typeface="Courier New" pitchFamily="34" charset="-122"/>
                 <a:cs typeface="Courier New" pitchFamily="34" charset="-120"/>
               </a:rPr>
-              <a:t>'LH'</a:t>
+              <a:t>'SKU-ELE-0000000001'</a:t>
             </a:r>
             <a:endParaRPr lang="en-US" sz="1050" dirty="0"/>
           </a:p>
@@ -18594,7 +18817,7 @@
                 <a:ea typeface="Courier New" pitchFamily="34" charset="-122"/>
                 <a:cs typeface="Courier New" pitchFamily="34" charset="-120"/>
               </a:rPr>
-              <a:t>    </a:t>
+              <a:t>  </a:t>
             </a:r>
             <a:r>
               <a:rPr lang="en-US" sz="1050" dirty="0">
@@ -18605,7 +18828,7 @@
                 <a:ea typeface="Courier New" pitchFamily="34" charset="-122"/>
                 <a:cs typeface="Courier New" pitchFamily="34" charset="-120"/>
               </a:rPr>
-              <a:t>AND</a:t>
+              <a:t>INTO</a:t>
             </a:r>
             <a:r>
               <a:rPr lang="en-US" sz="1050" dirty="0">
@@ -18627,7 +18850,7 @@
                 <a:ea typeface="Courier New" pitchFamily="34" charset="-122"/>
                 <a:cs typeface="Courier New" pitchFamily="34" charset="-120"/>
               </a:rPr>
-              <a:t>connection_id</a:t>
+              <a:t>(</a:t>
             </a:r>
             <a:r>
               <a:rPr lang="en-US" sz="1050" dirty="0">
@@ -18649,7 +18872,29 @@
                 <a:ea typeface="Courier New" pitchFamily="34" charset="-122"/>
                 <a:cs typeface="Courier New" pitchFamily="34" charset="-120"/>
               </a:rPr>
-              <a:t>=</a:t>
+              <a:t>@</a:t>
+            </a:r>
+            <a:r>
+              <a:rPr lang="en-US" sz="1050" dirty="0">
+                <a:solidFill>
+                  <a:srgbClr val="CCCCCC"/>
+                </a:solidFill>
+                <a:latin typeface="Courier New" pitchFamily="34" charset="0"/>
+                <a:ea typeface="Courier New" pitchFamily="34" charset="-122"/>
+                <a:cs typeface="Courier New" pitchFamily="34" charset="-120"/>
+              </a:rPr>
+              <a:t>nome</a:t>
+            </a:r>
+            <a:r>
+              <a:rPr lang="en-US" sz="1050" dirty="0">
+                <a:solidFill>
+                  <a:srgbClr val="CCCCCC"/>
+                </a:solidFill>
+                <a:latin typeface="Courier New" pitchFamily="34" charset="0"/>
+                <a:ea typeface="Courier New" pitchFamily="34" charset="-122"/>
+                <a:cs typeface="Courier New" pitchFamily="34" charset="-120"/>
+              </a:rPr>
+              <a:t>,</a:t>
             </a:r>
             <a:r>
               <a:rPr lang="en-US" sz="1050" dirty="0">
@@ -18665,13 +18910,57 @@
             <a:r>
               <a:rPr lang="en-US" sz="1050" dirty="0">
                 <a:solidFill>
-                  <a:srgbClr val="CE9178"/>
-                </a:solidFill>
-                <a:latin typeface="Courier New" pitchFamily="34" charset="0"/>
-                <a:ea typeface="Courier New" pitchFamily="34" charset="-122"/>
-                <a:cs typeface="Courier New" pitchFamily="34" charset="-120"/>
-              </a:rPr>
-              <a:t>'0400'</a:t>
+                  <a:srgbClr val="CCCCCC"/>
+                </a:solidFill>
+                <a:latin typeface="Courier New" pitchFamily="34" charset="0"/>
+                <a:ea typeface="Courier New" pitchFamily="34" charset="-122"/>
+                <a:cs typeface="Courier New" pitchFamily="34" charset="-120"/>
+              </a:rPr>
+              <a:t>@</a:t>
+            </a:r>
+            <a:r>
+              <a:rPr lang="en-US" sz="1050" dirty="0">
+                <a:solidFill>
+                  <a:srgbClr val="CCCCCC"/>
+                </a:solidFill>
+                <a:latin typeface="Courier New" pitchFamily="34" charset="0"/>
+                <a:ea typeface="Courier New" pitchFamily="34" charset="-122"/>
+                <a:cs typeface="Courier New" pitchFamily="34" charset="-120"/>
+              </a:rPr>
+              <a:t>qtde_disponivel</a:t>
+            </a:r>
+            <a:r>
+              <a:rPr lang="en-US" sz="1050" dirty="0">
+                <a:solidFill>
+                  <a:srgbClr val="CCCCCC"/>
+                </a:solidFill>
+                <a:latin typeface="Courier New" pitchFamily="34" charset="0"/>
+                <a:ea typeface="Courier New" pitchFamily="34" charset="-122"/>
+                <a:cs typeface="Courier New" pitchFamily="34" charset="-120"/>
+              </a:rPr>
+              <a:t> </a:t>
+            </a:r>
+            <a:r>
+              <a:rPr lang="en-US" sz="1050" dirty="0">
+                <a:solidFill>
+                  <a:srgbClr val="CCCCCC"/>
+                </a:solidFill>
+                <a:latin typeface="Courier New" pitchFamily="34" charset="0"/>
+                <a:ea typeface="Courier New" pitchFamily="34" charset="-122"/>
+                <a:cs typeface="Courier New" pitchFamily="34" charset="-120"/>
+              </a:rPr>
+              <a:t>)</a:t>
+            </a:r>
+            <a:r>
+              <a:rPr lang="en-US" sz="1050" dirty="0">
+                <a:solidFill>
+                  <a:srgbClr val="CCCCCC"/>
+                </a:solidFill>
+                <a:latin typeface="Courier New" pitchFamily="34" charset="0"/>
+                <a:ea typeface="Courier New" pitchFamily="34" charset="-122"/>
+                <a:cs typeface="Courier New" pitchFamily="34" charset="-120"/>
+              </a:rPr>
+              <a:t>.</a:t>
             </a:r>
             <a:endParaRPr lang="en-US" sz="1050" dirty="0"/>
           </a:p>
@@ -18685,156 +18974,13 @@
             <a:r>
               <a:rPr lang="en-US" sz="1050" dirty="0">
                 <a:solidFill>
-                  <a:srgbClr val="CCCCCC"/>
-                </a:solidFill>
-                <a:latin typeface="Courier New" pitchFamily="34" charset="0"/>
-                <a:ea typeface="Courier New" pitchFamily="34" charset="-122"/>
-                <a:cs typeface="Courier New" pitchFamily="34" charset="-120"/>
-              </a:rPr>
-              <a:t>  </a:t>
-            </a:r>
-            <a:r>
-              <a:rPr lang="en-US" sz="1050" dirty="0">
-                <a:solidFill>
-                  <a:srgbClr val="569CD6"/>
-                </a:solidFill>
-                <a:latin typeface="Courier New" pitchFamily="34" charset="0"/>
-                <a:ea typeface="Courier New" pitchFamily="34" charset="-122"/>
-                <a:cs typeface="Courier New" pitchFamily="34" charset="-120"/>
-              </a:rPr>
-              <a:t>INTO</a:t>
-            </a:r>
-            <a:r>
-              <a:rPr lang="en-US" sz="1050" dirty="0">
-                <a:solidFill>
-                  <a:srgbClr val="CCCCCC"/>
+                  <a:srgbClr val="000000"/>
                 </a:solidFill>
                 <a:latin typeface="Courier New" pitchFamily="34" charset="0"/>
                 <a:ea typeface="Courier New" pitchFamily="34" charset="-122"/>
                 <a:cs typeface="Courier New" pitchFamily="34" charset="-120"/>
               </a:rPr>
               <a:t> </a:t>
-            </a:r>
-            <a:r>
-              <a:rPr lang="en-US" sz="1050" dirty="0">
-                <a:solidFill>
-                  <a:srgbClr val="CCCCCC"/>
-                </a:solidFill>
-                <a:latin typeface="Courier New" pitchFamily="34" charset="0"/>
-                <a:ea typeface="Courier New" pitchFamily="34" charset="-122"/>
-                <a:cs typeface="Courier New" pitchFamily="34" charset="-120"/>
-              </a:rPr>
-              <a:t>(</a:t>
-            </a:r>
-            <a:r>
-              <a:rPr lang="en-US" sz="1050" dirty="0">
-                <a:solidFill>
-                  <a:srgbClr val="CCCCCC"/>
-                </a:solidFill>
-                <a:latin typeface="Courier New" pitchFamily="34" charset="0"/>
-                <a:ea typeface="Courier New" pitchFamily="34" charset="-122"/>
-                <a:cs typeface="Courier New" pitchFamily="34" charset="-120"/>
-              </a:rPr>
-              <a:t> </a:t>
-            </a:r>
-            <a:r>
-              <a:rPr lang="en-US" sz="1050" dirty="0">
-                <a:solidFill>
-                  <a:srgbClr val="CCCCCC"/>
-                </a:solidFill>
-                <a:latin typeface="Courier New" pitchFamily="34" charset="0"/>
-                <a:ea typeface="Courier New" pitchFamily="34" charset="-122"/>
-                <a:cs typeface="Courier New" pitchFamily="34" charset="-120"/>
-              </a:rPr>
-              <a:t>@</a:t>
-            </a:r>
-            <a:r>
-              <a:rPr lang="en-US" sz="1050" dirty="0">
-                <a:solidFill>
-                  <a:srgbClr val="CCCCCC"/>
-                </a:solidFill>
-                <a:latin typeface="Courier New" pitchFamily="34" charset="0"/>
-                <a:ea typeface="Courier New" pitchFamily="34" charset="-122"/>
-                <a:cs typeface="Courier New" pitchFamily="34" charset="-120"/>
-              </a:rPr>
-              <a:t>airport_from_id</a:t>
-            </a:r>
-            <a:r>
-              <a:rPr lang="en-US" sz="1050" dirty="0">
-                <a:solidFill>
-                  <a:srgbClr val="CCCCCC"/>
-                </a:solidFill>
-                <a:latin typeface="Courier New" pitchFamily="34" charset="0"/>
-                <a:ea typeface="Courier New" pitchFamily="34" charset="-122"/>
-                <a:cs typeface="Courier New" pitchFamily="34" charset="-120"/>
-              </a:rPr>
-              <a:t>,</a:t>
-            </a:r>
-            <a:r>
-              <a:rPr lang="en-US" sz="1050" dirty="0">
-                <a:solidFill>
-                  <a:srgbClr val="CCCCCC"/>
-                </a:solidFill>
-                <a:latin typeface="Courier New" pitchFamily="34" charset="0"/>
-                <a:ea typeface="Courier New" pitchFamily="34" charset="-122"/>
-                <a:cs typeface="Courier New" pitchFamily="34" charset="-120"/>
-              </a:rPr>
-              <a:t> </a:t>
-            </a:r>
-            <a:r>
-              <a:rPr lang="en-US" sz="1050" dirty="0">
-                <a:solidFill>
-                  <a:srgbClr val="CCCCCC"/>
-                </a:solidFill>
-                <a:latin typeface="Courier New" pitchFamily="34" charset="0"/>
-                <a:ea typeface="Courier New" pitchFamily="34" charset="-122"/>
-                <a:cs typeface="Courier New" pitchFamily="34" charset="-120"/>
-              </a:rPr>
-              <a:t>@</a:t>
-            </a:r>
-            <a:r>
-              <a:rPr lang="en-US" sz="1050" dirty="0">
-                <a:solidFill>
-                  <a:srgbClr val="CCCCCC"/>
-                </a:solidFill>
-                <a:latin typeface="Courier New" pitchFamily="34" charset="0"/>
-                <a:ea typeface="Courier New" pitchFamily="34" charset="-122"/>
-                <a:cs typeface="Courier New" pitchFamily="34" charset="-120"/>
-              </a:rPr>
-              <a:t>airport_to_id</a:t>
-            </a:r>
-            <a:r>
-              <a:rPr lang="en-US" sz="1050" dirty="0">
-                <a:solidFill>
-                  <a:srgbClr val="CCCCCC"/>
-                </a:solidFill>
-                <a:latin typeface="Courier New" pitchFamily="34" charset="0"/>
-                <a:ea typeface="Courier New" pitchFamily="34" charset="-122"/>
-                <a:cs typeface="Courier New" pitchFamily="34" charset="-120"/>
-              </a:rPr>
-              <a:t> </a:t>
-            </a:r>
-            <a:r>
-              <a:rPr lang="en-US" sz="1050" dirty="0">
-                <a:solidFill>
-                  <a:srgbClr val="CCCCCC"/>
-                </a:solidFill>
-                <a:latin typeface="Courier New" pitchFamily="34" charset="0"/>
-                <a:ea typeface="Courier New" pitchFamily="34" charset="-122"/>
-                <a:cs typeface="Courier New" pitchFamily="34" charset="-120"/>
-              </a:rPr>
-              <a:t>)</a:t>
-            </a:r>
-            <a:r>
-              <a:rPr lang="en-US" sz="1050" dirty="0">
-                <a:solidFill>
-                  <a:srgbClr val="CCCCCC"/>
-                </a:solidFill>
-                <a:latin typeface="Courier New" pitchFamily="34" charset="0"/>
-                <a:ea typeface="Courier New" pitchFamily="34" charset="-122"/>
-                <a:cs typeface="Courier New" pitchFamily="34" charset="-120"/>
-              </a:rPr>
-              <a:t>.</a:t>
             </a:r>
             <a:endParaRPr lang="en-US" sz="1050" dirty="0"/>
           </a:p>
@@ -18848,13 +18994,90 @@
             <a:r>
               <a:rPr lang="en-US" sz="1050" dirty="0">
                 <a:solidFill>
-                  <a:srgbClr val="000000"/>
+                  <a:srgbClr val="569CD6"/>
+                </a:solidFill>
+                <a:latin typeface="Courier New" pitchFamily="34" charset="0"/>
+                <a:ea typeface="Courier New" pitchFamily="34" charset="-122"/>
+                <a:cs typeface="Courier New" pitchFamily="34" charset="-120"/>
+              </a:rPr>
+              <a:t>IF</a:t>
+            </a:r>
+            <a:r>
+              <a:rPr lang="en-US" sz="1050" dirty="0">
+                <a:solidFill>
+                  <a:srgbClr val="CCCCCC"/>
                 </a:solidFill>
                 <a:latin typeface="Courier New" pitchFamily="34" charset="0"/>
                 <a:ea typeface="Courier New" pitchFamily="34" charset="-122"/>
                 <a:cs typeface="Courier New" pitchFamily="34" charset="-120"/>
               </a:rPr>
               <a:t> </a:t>
+            </a:r>
+            <a:r>
+              <a:rPr lang="en-US" sz="1050" dirty="0">
+                <a:solidFill>
+                  <a:srgbClr val="CCCCCC"/>
+                </a:solidFill>
+                <a:latin typeface="Courier New" pitchFamily="34" charset="0"/>
+                <a:ea typeface="Courier New" pitchFamily="34" charset="-122"/>
+                <a:cs typeface="Courier New" pitchFamily="34" charset="-120"/>
+              </a:rPr>
+              <a:t>sy-subrc</a:t>
+            </a:r>
+            <a:r>
+              <a:rPr lang="en-US" sz="1050" dirty="0">
+                <a:solidFill>
+                  <a:srgbClr val="CCCCCC"/>
+                </a:solidFill>
+                <a:latin typeface="Courier New" pitchFamily="34" charset="0"/>
+                <a:ea typeface="Courier New" pitchFamily="34" charset="-122"/>
+                <a:cs typeface="Courier New" pitchFamily="34" charset="-120"/>
+              </a:rPr>
+              <a:t> </a:t>
+            </a:r>
+            <a:r>
+              <a:rPr lang="en-US" sz="1050" dirty="0">
+                <a:solidFill>
+                  <a:srgbClr val="CCCCCC"/>
+                </a:solidFill>
+                <a:latin typeface="Courier New" pitchFamily="34" charset="0"/>
+                <a:ea typeface="Courier New" pitchFamily="34" charset="-122"/>
+                <a:cs typeface="Courier New" pitchFamily="34" charset="-120"/>
+              </a:rPr>
+              <a:t>=</a:t>
+            </a:r>
+            <a:r>
+              <a:rPr lang="en-US" sz="1050" dirty="0">
+                <a:solidFill>
+                  <a:srgbClr val="CCCCCC"/>
+                </a:solidFill>
+                <a:latin typeface="Courier New" pitchFamily="34" charset="0"/>
+                <a:ea typeface="Courier New" pitchFamily="34" charset="-122"/>
+                <a:cs typeface="Courier New" pitchFamily="34" charset="-120"/>
+              </a:rPr>
+              <a:t> </a:t>
+            </a:r>
+            <a:r>
+              <a:rPr lang="en-US" sz="1050" dirty="0">
+                <a:solidFill>
+                  <a:srgbClr val="B5CEA8"/>
+                </a:solidFill>
+                <a:latin typeface="Courier New" pitchFamily="34" charset="0"/>
+                <a:ea typeface="Courier New" pitchFamily="34" charset="-122"/>
+                <a:cs typeface="Courier New" pitchFamily="34" charset="-120"/>
+              </a:rPr>
+              <a:t>0</a:t>
+            </a:r>
+            <a:r>
+              <a:rPr lang="en-US" sz="1050" dirty="0">
+                <a:solidFill>
+                  <a:srgbClr val="CCCCCC"/>
+                </a:solidFill>
+                <a:latin typeface="Courier New" pitchFamily="34" charset="0"/>
+                <a:ea typeface="Courier New" pitchFamily="34" charset="-122"/>
+                <a:cs typeface="Courier New" pitchFamily="34" charset="-120"/>
+              </a:rPr>
+              <a:t>.</a:t>
             </a:r>
             <a:endParaRPr lang="en-US" sz="1050" dirty="0"/>
           </a:p>
@@ -18868,13 +19091,57 @@
             <a:r>
               <a:rPr lang="en-US" sz="1050" dirty="0">
                 <a:solidFill>
-                  <a:srgbClr val="569CD6"/>
-                </a:solidFill>
-                <a:latin typeface="Courier New" pitchFamily="34" charset="0"/>
-                <a:ea typeface="Courier New" pitchFamily="34" charset="-122"/>
-                <a:cs typeface="Courier New" pitchFamily="34" charset="-120"/>
-              </a:rPr>
-              <a:t>IF</a:t>
+                  <a:srgbClr val="CCCCCC"/>
+                </a:solidFill>
+                <a:latin typeface="Courier New" pitchFamily="34" charset="0"/>
+                <a:ea typeface="Courier New" pitchFamily="34" charset="-122"/>
+                <a:cs typeface="Courier New" pitchFamily="34" charset="-120"/>
+              </a:rPr>
+              <a:t>  </a:t>
+            </a:r>
+            <a:r>
+              <a:rPr lang="en-US" sz="1050" dirty="0">
+                <a:solidFill>
+                  <a:srgbClr val="CCCCCC"/>
+                </a:solidFill>
+                <a:latin typeface="Courier New" pitchFamily="34" charset="0"/>
+                <a:ea typeface="Courier New" pitchFamily="34" charset="-122"/>
+                <a:cs typeface="Courier New" pitchFamily="34" charset="-120"/>
+              </a:rPr>
+              <a:t>out-</a:t>
+            </a:r>
+            <a:r>
+              <a:rPr lang="en-US" sz="1050" dirty="0">
+                <a:solidFill>
+                  <a:srgbClr val="CCCCCC"/>
+                </a:solidFill>
+                <a:latin typeface="Courier New" pitchFamily="34" charset="0"/>
+                <a:ea typeface="Courier New" pitchFamily="34" charset="-122"/>
+                <a:cs typeface="Courier New" pitchFamily="34" charset="-120"/>
+              </a:rPr>
+              <a:t>&gt;</a:t>
+            </a:r>
+            <a:r>
+              <a:rPr lang="en-US" sz="1050" dirty="0">
+                <a:solidFill>
+                  <a:srgbClr val="CCCCCC"/>
+                </a:solidFill>
+                <a:latin typeface="Courier New" pitchFamily="34" charset="0"/>
+                <a:ea typeface="Courier New" pitchFamily="34" charset="-122"/>
+                <a:cs typeface="Courier New" pitchFamily="34" charset="-120"/>
+              </a:rPr>
+              <a:t>write</a:t>
+            </a:r>
+            <a:r>
+              <a:rPr lang="en-US" sz="1050" dirty="0">
+                <a:solidFill>
+                  <a:srgbClr val="CCCCCC"/>
+                </a:solidFill>
+                <a:latin typeface="Courier New" pitchFamily="34" charset="0"/>
+                <a:ea typeface="Courier New" pitchFamily="34" charset="-122"/>
+                <a:cs typeface="Courier New" pitchFamily="34" charset="-120"/>
+              </a:rPr>
+              <a:t>(</a:t>
             </a:r>
             <a:r>
               <a:rPr lang="en-US" sz="1050" dirty="0">
@@ -18890,13 +19157,13 @@
             <a:r>
               <a:rPr lang="en-US" sz="1050" dirty="0">
                 <a:solidFill>
-                  <a:srgbClr val="CCCCCC"/>
-                </a:solidFill>
-                <a:latin typeface="Courier New" pitchFamily="34" charset="0"/>
-                <a:ea typeface="Courier New" pitchFamily="34" charset="-122"/>
-                <a:cs typeface="Courier New" pitchFamily="34" charset="-120"/>
-              </a:rPr>
-              <a:t>sy-subrc</a:t>
+                  <a:srgbClr val="CE9178"/>
+                </a:solidFill>
+                <a:latin typeface="Courier New" pitchFamily="34" charset="0"/>
+                <a:ea typeface="Courier New" pitchFamily="34" charset="-122"/>
+                <a:cs typeface="Courier New" pitchFamily="34" charset="-120"/>
+              </a:rPr>
+              <a:t>|{ nome }: { qtde_disponivel } disponíveis|</a:t>
             </a:r>
             <a:r>
               <a:rPr lang="en-US" sz="1050" dirty="0">
@@ -18918,29 +19185,7 @@
                 <a:ea typeface="Courier New" pitchFamily="34" charset="-122"/>
                 <a:cs typeface="Courier New" pitchFamily="34" charset="-120"/>
               </a:rPr>
-              <a:t>=</a:t>
-            </a:r>
-            <a:r>
-              <a:rPr lang="en-US" sz="1050" dirty="0">
-                <a:solidFill>
-                  <a:srgbClr val="CCCCCC"/>
-                </a:solidFill>
-                <a:latin typeface="Courier New" pitchFamily="34" charset="0"/>
-                <a:ea typeface="Courier New" pitchFamily="34" charset="-122"/>
-                <a:cs typeface="Courier New" pitchFamily="34" charset="-120"/>
-              </a:rPr>
-              <a:t> </a:t>
-            </a:r>
-            <a:r>
-              <a:rPr lang="en-US" sz="1050" dirty="0">
-                <a:solidFill>
-                  <a:srgbClr val="B5CEA8"/>
-                </a:solidFill>
-                <a:latin typeface="Courier New" pitchFamily="34" charset="0"/>
-                <a:ea typeface="Courier New" pitchFamily="34" charset="-122"/>
-                <a:cs typeface="Courier New" pitchFamily="34" charset="-120"/>
-              </a:rPr>
-              <a:t>0</a:t>
+              <a:t>)</a:t>
             </a:r>
             <a:r>
               <a:rPr lang="en-US" sz="1050" dirty="0">
@@ -18965,101 +19210,13 @@
             <a:r>
               <a:rPr lang="en-US" sz="1050" dirty="0">
                 <a:solidFill>
-                  <a:srgbClr val="CCCCCC"/>
-                </a:solidFill>
-                <a:latin typeface="Courier New" pitchFamily="34" charset="0"/>
-                <a:ea typeface="Courier New" pitchFamily="34" charset="-122"/>
-                <a:cs typeface="Courier New" pitchFamily="34" charset="-120"/>
-              </a:rPr>
-              <a:t>  </a:t>
-            </a:r>
-            <a:r>
-              <a:rPr lang="en-US" sz="1050" dirty="0">
-                <a:solidFill>
-                  <a:srgbClr val="CCCCCC"/>
-                </a:solidFill>
-                <a:latin typeface="Courier New" pitchFamily="34" charset="0"/>
-                <a:ea typeface="Courier New" pitchFamily="34" charset="-122"/>
-                <a:cs typeface="Courier New" pitchFamily="34" charset="-120"/>
-              </a:rPr>
-              <a:t>out-</a:t>
-            </a:r>
-            <a:r>
-              <a:rPr lang="en-US" sz="1050" dirty="0">
-                <a:solidFill>
-                  <a:srgbClr val="CCCCCC"/>
-                </a:solidFill>
-                <a:latin typeface="Courier New" pitchFamily="34" charset="0"/>
-                <a:ea typeface="Courier New" pitchFamily="34" charset="-122"/>
-                <a:cs typeface="Courier New" pitchFamily="34" charset="-120"/>
-              </a:rPr>
-              <a:t>&gt;</a:t>
-            </a:r>
-            <a:r>
-              <a:rPr lang="en-US" sz="1050" dirty="0">
-                <a:solidFill>
-                  <a:srgbClr val="CCCCCC"/>
-                </a:solidFill>
-                <a:latin typeface="Courier New" pitchFamily="34" charset="0"/>
-                <a:ea typeface="Courier New" pitchFamily="34" charset="-122"/>
-                <a:cs typeface="Courier New" pitchFamily="34" charset="-120"/>
-              </a:rPr>
-              <a:t>write</a:t>
-            </a:r>
-            <a:r>
-              <a:rPr lang="en-US" sz="1050" dirty="0">
-                <a:solidFill>
-                  <a:srgbClr val="CCCCCC"/>
-                </a:solidFill>
-                <a:latin typeface="Courier New" pitchFamily="34" charset="0"/>
-                <a:ea typeface="Courier New" pitchFamily="34" charset="-122"/>
-                <a:cs typeface="Courier New" pitchFamily="34" charset="-120"/>
-              </a:rPr>
-              <a:t>(</a:t>
-            </a:r>
-            <a:r>
-              <a:rPr lang="en-US" sz="1050" dirty="0">
-                <a:solidFill>
-                  <a:srgbClr val="CCCCCC"/>
-                </a:solidFill>
-                <a:latin typeface="Courier New" pitchFamily="34" charset="0"/>
-                <a:ea typeface="Courier New" pitchFamily="34" charset="-122"/>
-                <a:cs typeface="Courier New" pitchFamily="34" charset="-120"/>
-              </a:rPr>
-              <a:t> </a:t>
-            </a:r>
-            <a:r>
-              <a:rPr lang="en-US" sz="1050" dirty="0">
-                <a:solidFill>
-                  <a:srgbClr val="CE9178"/>
-                </a:solidFill>
-                <a:latin typeface="Courier New" pitchFamily="34" charset="0"/>
-                <a:ea typeface="Courier New" pitchFamily="34" charset="-122"/>
-                <a:cs typeface="Courier New" pitchFamily="34" charset="-120"/>
-              </a:rPr>
-              <a:t>|LH 400: { airport_from_id } → { airport_to_id }|</a:t>
-            </a:r>
-            <a:r>
-              <a:rPr lang="en-US" sz="1050" dirty="0">
-                <a:solidFill>
-                  <a:srgbClr val="CCCCCC"/>
-                </a:solidFill>
-                <a:latin typeface="Courier New" pitchFamily="34" charset="0"/>
-                <a:ea typeface="Courier New" pitchFamily="34" charset="-122"/>
-                <a:cs typeface="Courier New" pitchFamily="34" charset="-120"/>
-              </a:rPr>
-              <a:t> </a:t>
-            </a:r>
-            <a:r>
-              <a:rPr lang="en-US" sz="1050" dirty="0">
-                <a:solidFill>
-                  <a:srgbClr val="CCCCCC"/>
-                </a:solidFill>
-                <a:latin typeface="Courier New" pitchFamily="34" charset="0"/>
-                <a:ea typeface="Courier New" pitchFamily="34" charset="-122"/>
-                <a:cs typeface="Courier New" pitchFamily="34" charset="-120"/>
-              </a:rPr>
-              <a:t>)</a:t>
+                  <a:srgbClr val="569CD6"/>
+                </a:solidFill>
+                <a:latin typeface="Courier New" pitchFamily="34" charset="0"/>
+                <a:ea typeface="Courier New" pitchFamily="34" charset="-122"/>
+                <a:cs typeface="Courier New" pitchFamily="34" charset="-120"/>
+              </a:rPr>
+              <a:t>ELSE</a:t>
             </a:r>
             <a:r>
               <a:rPr lang="en-US" sz="1050" dirty="0">
@@ -19084,37 +19241,6 @@
             <a:r>
               <a:rPr lang="en-US" sz="1050" dirty="0">
                 <a:solidFill>
-                  <a:srgbClr val="569CD6"/>
-                </a:solidFill>
-                <a:latin typeface="Courier New" pitchFamily="34" charset="0"/>
-                <a:ea typeface="Courier New" pitchFamily="34" charset="-122"/>
-                <a:cs typeface="Courier New" pitchFamily="34" charset="-120"/>
-              </a:rPr>
-              <a:t>ELSE</a:t>
-            </a:r>
-            <a:r>
-              <a:rPr lang="en-US" sz="1050" dirty="0">
-                <a:solidFill>
-                  <a:srgbClr val="CCCCCC"/>
-                </a:solidFill>
-                <a:latin typeface="Courier New" pitchFamily="34" charset="0"/>
-                <a:ea typeface="Courier New" pitchFamily="34" charset="-122"/>
-                <a:cs typeface="Courier New" pitchFamily="34" charset="-120"/>
-              </a:rPr>
-              <a:t>.</a:t>
-            </a:r>
-            <a:endParaRPr lang="en-US" sz="1050" dirty="0"/>
-          </a:p>
-          <a:p>
-            <a:pPr indent="0" marL="0">
-              <a:lnSpc>
-                <a:spcPct val="105000"/>
-              </a:lnSpc>
-              <a:buNone/>
-            </a:pPr>
-            <a:r>
-              <a:rPr lang="en-US" sz="1050" dirty="0">
-                <a:solidFill>
                   <a:srgbClr val="CCCCCC"/>
                 </a:solidFill>
                 <a:latin typeface="Courier New" pitchFamily="34" charset="0"/>
@@ -19187,7 +19313,7 @@
                 <a:ea typeface="Courier New" pitchFamily="34" charset="-122"/>
                 <a:cs typeface="Courier New" pitchFamily="34" charset="-120"/>
               </a:rPr>
-              <a:t>`Voo não encontrado`</a:t>
+              <a:t>`Item não encontrado`</a:t>
             </a:r>
             <a:r>
               <a:rPr lang="en-US" sz="1050" dirty="0">
@@ -19397,7 +19523,7 @@
                   <a:srgbClr val="556B82"/>
                 </a:solidFill>
               </a:rPr>
-              <a:t>Lê no máximo uma linha; identifique-a pela chave completa.</a:t>
+              <a:t>Lê no máximo uma linha; identifique-a pela chave ou por um campo único, como o SKU.</a:t>
             </a:r>
             <a:endParaRPr lang="en-US" sz="1400" dirty="0"/>
           </a:p>
@@ -19980,7 +20106,7 @@
         <p:spPr>
           <a:xfrm>
             <a:off x="640080" y="1700784"/>
-            <a:ext cx="2153412" cy="292608"/>
+            <a:ext cx="2930652" cy="292608"/>
           </a:xfrm>
           <a:prstGeom prst="rect">
             <a:avLst/>
@@ -20000,7 +20126,7 @@
         <p:spPr>
           <a:xfrm>
             <a:off x="640080" y="1700784"/>
-            <a:ext cx="2153412" cy="27432"/>
+            <a:ext cx="2930652" cy="27432"/>
           </a:xfrm>
           <a:prstGeom prst="rect">
             <a:avLst/>
@@ -20020,7 +20146,7 @@
         <p:spPr>
           <a:xfrm>
             <a:off x="731520" y="1719072"/>
-            <a:ext cx="1970532" cy="274320"/>
+            <a:ext cx="2747772" cy="274320"/>
           </a:xfrm>
           <a:prstGeom prst="rect">
             <a:avLst/>
@@ -20041,7 +20167,7 @@
                   <a:srgbClr val="FFFFFF"/>
                 </a:solidFill>
               </a:rPr>
-              <a:t>zcl_04_select.clas.abap</a:t>
+              <a:t>zcl_pc_consulta_estoque.clas.abap</a:t>
             </a:r>
             <a:endParaRPr lang="en-US" sz="950" dirty="0"/>
           </a:p>
@@ -20077,7 +20203,7 @@
                   <a:srgbClr val="9DA5B4"/>
                 </a:solidFill>
               </a:rPr>
-              <a:t>ZS4D400_## › ZCL_04_SELECT › main</a:t>
+              <a:t>Exemplo sobre ZAVBS_PC_ESTOQUE › main</a:t>
             </a:r>
             <a:endParaRPr lang="en-US" sz="850" dirty="0"/>
           </a:p>
@@ -20439,13 +20565,13 @@
             <a:r>
               <a:rPr lang="en-US" sz="1050" dirty="0">
                 <a:solidFill>
-                  <a:srgbClr val="4EC9B0"/>
-                </a:solidFill>
-                <a:latin typeface="Courier New" pitchFamily="34" charset="0"/>
-                <a:ea typeface="Courier New" pitchFamily="34" charset="-122"/>
-                <a:cs typeface="Courier New" pitchFamily="34" charset="-120"/>
-              </a:rPr>
-              <a:t>/dmo/connection</a:t>
+                  <a:srgbClr val="CCCCCC"/>
+                </a:solidFill>
+                <a:latin typeface="Courier New" pitchFamily="34" charset="0"/>
+                <a:ea typeface="Courier New" pitchFamily="34" charset="-122"/>
+                <a:cs typeface="Courier New" pitchFamily="34" charset="-120"/>
+              </a:rPr>
+              <a:t>zta_pc_item</a:t>
             </a:r>
             <a:endParaRPr lang="en-US" sz="1050" dirty="0"/>
           </a:p>
@@ -20498,7 +20624,7 @@
                 <a:ea typeface="Courier New" pitchFamily="34" charset="-122"/>
                 <a:cs typeface="Courier New" pitchFamily="34" charset="-120"/>
               </a:rPr>
-              <a:t>carrier_id</a:t>
+              <a:t>sku</a:t>
             </a:r>
             <a:r>
               <a:rPr lang="en-US" sz="1050" dirty="0">
@@ -20531,7 +20657,7 @@
                 <a:ea typeface="Courier New" pitchFamily="34" charset="-122"/>
                 <a:cs typeface="Courier New" pitchFamily="34" charset="-120"/>
               </a:rPr>
-              <a:t>connection_id</a:t>
+              <a:t>nome</a:t>
             </a:r>
             <a:r>
               <a:rPr lang="en-US" sz="1050" dirty="0">
@@ -20573,7 +20699,7 @@
                 <a:ea typeface="Courier New" pitchFamily="34" charset="-122"/>
                 <a:cs typeface="Courier New" pitchFamily="34" charset="-120"/>
               </a:rPr>
-              <a:t>airport_from_id</a:t>
+              <a:t>categoria</a:t>
             </a:r>
             <a:r>
               <a:rPr lang="en-US" sz="1050" dirty="0">
@@ -20606,7 +20732,7 @@
                 <a:ea typeface="Courier New" pitchFamily="34" charset="-122"/>
                 <a:cs typeface="Courier New" pitchFamily="34" charset="-120"/>
               </a:rPr>
-              <a:t>airport_to_id</a:t>
+              <a:t>qtde_disponivel</a:t>
             </a:r>
             <a:endParaRPr lang="en-US" sz="1050" dirty="0"/>
           </a:p>
@@ -20659,7 +20785,7 @@
                 <a:ea typeface="Courier New" pitchFamily="34" charset="-122"/>
                 <a:cs typeface="Courier New" pitchFamily="34" charset="-120"/>
               </a:rPr>
-              <a:t>carrier_id</a:t>
+              <a:t>categoria</a:t>
             </a:r>
             <a:r>
               <a:rPr lang="en-US" sz="1050" dirty="0">
@@ -20714,7 +20840,7 @@
                 <a:ea typeface="Courier New" pitchFamily="34" charset="-122"/>
                 <a:cs typeface="Courier New" pitchFamily="34" charset="-120"/>
               </a:rPr>
-              <a:t>carrier</a:t>
+              <a:t>categoria</a:t>
             </a:r>
             <a:endParaRPr lang="en-US" sz="1050" dirty="0"/>
           </a:p>
@@ -20789,7 +20915,7 @@
                 <a:ea typeface="Courier New" pitchFamily="34" charset="-122"/>
                 <a:cs typeface="Courier New" pitchFamily="34" charset="-120"/>
               </a:rPr>
-              <a:t>connection_id</a:t>
+              <a:t>nome</a:t>
             </a:r>
             <a:endParaRPr lang="en-US" sz="1050" dirty="0"/>
           </a:p>
@@ -20897,7 +21023,7 @@
                 <a:ea typeface="Courier New" pitchFamily="34" charset="-122"/>
                 <a:cs typeface="Courier New" pitchFamily="34" charset="-120"/>
               </a:rPr>
-              <a:t>connections</a:t>
+              <a:t>itens</a:t>
             </a:r>
             <a:r>
               <a:rPr lang="en-US" sz="1050" dirty="0">
@@ -21111,7 +21237,7 @@
                 <a:ea typeface="Courier New" pitchFamily="34" charset="-122"/>
                 <a:cs typeface="Courier New" pitchFamily="34" charset="-120"/>
               </a:rPr>
-              <a:t>|{ sy-dbcnt } conexões lidas|</a:t>
+              <a:t>|{ sy-dbcnt } itens lidos|</a:t>
             </a:r>
             <a:r>
               <a:rPr lang="en-US" sz="1050" dirty="0">
@@ -21228,7 +21354,7 @@
                 <a:ea typeface="Courier New" pitchFamily="34" charset="-122"/>
                 <a:cs typeface="Courier New" pitchFamily="34" charset="-120"/>
               </a:rPr>
-              <a:t>connections</a:t>
+              <a:t>itens</a:t>
             </a:r>
             <a:r>
               <a:rPr lang="en-US" sz="1050" dirty="0">
@@ -21294,7 +21420,7 @@
                 <a:ea typeface="Courier New" pitchFamily="34" charset="-122"/>
                 <a:cs typeface="Courier New" pitchFamily="34" charset="-120"/>
               </a:rPr>
-              <a:t>connection</a:t>
+              <a:t>item</a:t>
             </a:r>
             <a:r>
               <a:rPr lang="en-US" sz="1050" dirty="0">
@@ -21402,7 +21528,7 @@
                 <a:ea typeface="Courier New" pitchFamily="34" charset="-122"/>
                 <a:cs typeface="Courier New" pitchFamily="34" charset="-120"/>
               </a:rPr>
-              <a:t>|{ connection-carrier_id } { connection-connection_id }|</a:t>
+              <a:t>|{ item-sku } { item-nome }|</a:t>
             </a:r>
             <a:r>
               <a:rPr lang="en-US" sz="1050" dirty="0">
